--- a/Project Presentation Slides.pptx
+++ b/Project Presentation Slides.pptx
@@ -5,22 +5,23 @@
     <p:sldMasterId id="2147483648" r:id="rId1"/>
   </p:sldMasterIdLst>
   <p:notesMasterIdLst>
-    <p:notesMasterId r:id="rId15"/>
+    <p:notesMasterId r:id="rId16"/>
   </p:notesMasterIdLst>
   <p:sldIdLst>
     <p:sldId id="256" r:id="rId2"/>
     <p:sldId id="258" r:id="rId3"/>
-    <p:sldId id="273" r:id="rId4"/>
-    <p:sldId id="260" r:id="rId5"/>
-    <p:sldId id="266" r:id="rId6"/>
-    <p:sldId id="268" r:id="rId7"/>
-    <p:sldId id="267" r:id="rId8"/>
-    <p:sldId id="274" r:id="rId9"/>
-    <p:sldId id="275" r:id="rId10"/>
-    <p:sldId id="276" r:id="rId11"/>
-    <p:sldId id="270" r:id="rId12"/>
-    <p:sldId id="261" r:id="rId13"/>
-    <p:sldId id="263" r:id="rId14"/>
+    <p:sldId id="277" r:id="rId4"/>
+    <p:sldId id="273" r:id="rId5"/>
+    <p:sldId id="260" r:id="rId6"/>
+    <p:sldId id="266" r:id="rId7"/>
+    <p:sldId id="268" r:id="rId8"/>
+    <p:sldId id="267" r:id="rId9"/>
+    <p:sldId id="274" r:id="rId10"/>
+    <p:sldId id="275" r:id="rId11"/>
+    <p:sldId id="276" r:id="rId12"/>
+    <p:sldId id="270" r:id="rId13"/>
+    <p:sldId id="261" r:id="rId14"/>
+    <p:sldId id="263" r:id="rId15"/>
   </p:sldIdLst>
   <p:sldSz cx="12192000" cy="6858000"/>
   <p:notesSz cx="6858000" cy="9144000"/>
@@ -130,9 +131,862 @@
 <file path=ppt/revisionInfo.xml><?xml version="1.0" encoding="utf-8"?>
 <p1510:revInfo xmlns:a="http://schemas.openxmlformats.org/drawingml/2006/main" xmlns:r="http://schemas.openxmlformats.org/officeDocument/2006/relationships" xmlns:p1510="http://schemas.microsoft.com/office/powerpoint/2015/10/main">
   <p1510:revLst>
-    <p1510:client id="{3D54A1A1-07DF-4CC4-AA38-3B09A91CA91B}" v="283" dt="2026-04-23T03:39:41.309"/>
+    <p1510:client id="{3D54A1A1-07DF-4CC4-AA38-3B09A91CA91B}" v="289" dt="2026-04-27T05:28:13.646"/>
   </p1510:revLst>
 </p1510:revInfo>
+</file>
+
+<file path=ppt/changesInfos/changesInfo1.xml><?xml version="1.0" encoding="utf-8"?>
+<pc:chgInfo xmlns:a="http://schemas.openxmlformats.org/drawingml/2006/main" xmlns:r="http://schemas.openxmlformats.org/officeDocument/2006/relationships" xmlns:ac="http://schemas.microsoft.com/office/drawing/2013/main/command" xmlns:pc="http://schemas.microsoft.com/office/powerpoint/2013/main/command">
+  <pc:docChgLst>
+    <pc:chgData name="Brian Leung" userId="dd50ab1c25e28f6f" providerId="LiveId" clId="{594B7852-E483-4D99-B4A6-A863D3824C6F}"/>
+    <pc:docChg chg="undo redo custSel addSld delSld modSld sldOrd">
+      <pc:chgData name="Brian Leung" userId="dd50ab1c25e28f6f" providerId="LiveId" clId="{594B7852-E483-4D99-B4A6-A863D3824C6F}" dt="2026-04-27T05:36:04.269" v="2293" actId="113"/>
+      <pc:docMkLst>
+        <pc:docMk/>
+      </pc:docMkLst>
+      <pc:sldChg chg="addSp modSp mod setBg addAnim">
+        <pc:chgData name="Brian Leung" userId="dd50ab1c25e28f6f" providerId="LiveId" clId="{594B7852-E483-4D99-B4A6-A863D3824C6F}" dt="2026-04-23T01:22:27.911" v="1576"/>
+        <pc:sldMkLst>
+          <pc:docMk/>
+          <pc:sldMk cId="669837791" sldId="256"/>
+        </pc:sldMkLst>
+        <pc:spChg chg="mod">
+          <ac:chgData name="Brian Leung" userId="dd50ab1c25e28f6f" providerId="LiveId" clId="{594B7852-E483-4D99-B4A6-A863D3824C6F}" dt="2026-04-23T01:22:27.903" v="1574" actId="26606"/>
+          <ac:spMkLst>
+            <pc:docMk/>
+            <pc:sldMk cId="669837791" sldId="256"/>
+            <ac:spMk id="2" creationId="{61BC088F-CFAA-CF75-9237-2BD45440612A}"/>
+          </ac:spMkLst>
+        </pc:spChg>
+        <pc:spChg chg="mod">
+          <ac:chgData name="Brian Leung" userId="dd50ab1c25e28f6f" providerId="LiveId" clId="{594B7852-E483-4D99-B4A6-A863D3824C6F}" dt="2026-04-23T01:22:27.903" v="1574" actId="26606"/>
+          <ac:spMkLst>
+            <pc:docMk/>
+            <pc:sldMk cId="669837791" sldId="256"/>
+            <ac:spMk id="3" creationId="{340DA5BE-A7D3-B008-E51A-1CC46AFF89A0}"/>
+          </ac:spMkLst>
+        </pc:spChg>
+        <pc:spChg chg="add">
+          <ac:chgData name="Brian Leung" userId="dd50ab1c25e28f6f" providerId="LiveId" clId="{594B7852-E483-4D99-B4A6-A863D3824C6F}" dt="2026-04-23T01:22:27.903" v="1574" actId="26606"/>
+          <ac:spMkLst>
+            <pc:docMk/>
+            <pc:sldMk cId="669837791" sldId="256"/>
+            <ac:spMk id="8" creationId="{1A3C89F8-0D2F-47FF-B903-151248265F47}"/>
+          </ac:spMkLst>
+        </pc:spChg>
+        <pc:spChg chg="add">
+          <ac:chgData name="Brian Leung" userId="dd50ab1c25e28f6f" providerId="LiveId" clId="{594B7852-E483-4D99-B4A6-A863D3824C6F}" dt="2026-04-23T01:22:27.903" v="1574" actId="26606"/>
+          <ac:spMkLst>
+            <pc:docMk/>
+            <pc:sldMk cId="669837791" sldId="256"/>
+            <ac:spMk id="10" creationId="{C5CB530E-515E-412C-9DF1-5F8FFBD6F383}"/>
+          </ac:spMkLst>
+        </pc:spChg>
+        <pc:spChg chg="add">
+          <ac:chgData name="Brian Leung" userId="dd50ab1c25e28f6f" providerId="LiveId" clId="{594B7852-E483-4D99-B4A6-A863D3824C6F}" dt="2026-04-23T01:22:27.903" v="1574" actId="26606"/>
+          <ac:spMkLst>
+            <pc:docMk/>
+            <pc:sldMk cId="669837791" sldId="256"/>
+            <ac:spMk id="12" creationId="{712D4376-A578-4FF1-94FC-245E7A6A489F}"/>
+          </ac:spMkLst>
+        </pc:spChg>
+        <pc:spChg chg="add">
+          <ac:chgData name="Brian Leung" userId="dd50ab1c25e28f6f" providerId="LiveId" clId="{594B7852-E483-4D99-B4A6-A863D3824C6F}" dt="2026-04-23T01:22:27.903" v="1574" actId="26606"/>
+          <ac:spMkLst>
+            <pc:docMk/>
+            <pc:sldMk cId="669837791" sldId="256"/>
+            <ac:spMk id="14" creationId="{AEA7509D-F04F-40CB-A0B3-EEF16499CC9F}"/>
+          </ac:spMkLst>
+        </pc:spChg>
+        <pc:spChg chg="add">
+          <ac:chgData name="Brian Leung" userId="dd50ab1c25e28f6f" providerId="LiveId" clId="{594B7852-E483-4D99-B4A6-A863D3824C6F}" dt="2026-04-23T01:22:27.903" v="1574" actId="26606"/>
+          <ac:spMkLst>
+            <pc:docMk/>
+            <pc:sldMk cId="669837791" sldId="256"/>
+            <ac:spMk id="18" creationId="{508BEF50-7B1E-49A4-BC19-5F4F1D755E64}"/>
+          </ac:spMkLst>
+        </pc:spChg>
+        <pc:spChg chg="add">
+          <ac:chgData name="Brian Leung" userId="dd50ab1c25e28f6f" providerId="LiveId" clId="{594B7852-E483-4D99-B4A6-A863D3824C6F}" dt="2026-04-23T01:22:27.903" v="1574" actId="26606"/>
+          <ac:spMkLst>
+            <pc:docMk/>
+            <pc:sldMk cId="669837791" sldId="256"/>
+            <ac:spMk id="20" creationId="{3FBAD350-5664-4811-A208-657FB882D350}"/>
+          </ac:spMkLst>
+        </pc:spChg>
+        <pc:spChg chg="add">
+          <ac:chgData name="Brian Leung" userId="dd50ab1c25e28f6f" providerId="LiveId" clId="{594B7852-E483-4D99-B4A6-A863D3824C6F}" dt="2026-04-23T01:22:27.903" v="1574" actId="26606"/>
+          <ac:spMkLst>
+            <pc:docMk/>
+            <pc:sldMk cId="669837791" sldId="256"/>
+            <ac:spMk id="22" creationId="{C39ADB8F-D187-49D7-BDCF-C1B6DC727068}"/>
+          </ac:spMkLst>
+        </pc:spChg>
+        <pc:cxnChg chg="add">
+          <ac:chgData name="Brian Leung" userId="dd50ab1c25e28f6f" providerId="LiveId" clId="{594B7852-E483-4D99-B4A6-A863D3824C6F}" dt="2026-04-23T01:22:27.903" v="1574" actId="26606"/>
+          <ac:cxnSpMkLst>
+            <pc:docMk/>
+            <pc:sldMk cId="669837791" sldId="256"/>
+            <ac:cxnSpMk id="16" creationId="{56020367-4FD5-4596-8E10-C5F095CD8DBF}"/>
+          </ac:cxnSpMkLst>
+        </pc:cxnChg>
+      </pc:sldChg>
+      <pc:sldChg chg="addSp modSp new mod ord setBg">
+        <pc:chgData name="Brian Leung" userId="dd50ab1c25e28f6f" providerId="LiveId" clId="{594B7852-E483-4D99-B4A6-A863D3824C6F}" dt="2026-04-27T05:33:48.116" v="2281" actId="13926"/>
+        <pc:sldMkLst>
+          <pc:docMk/>
+          <pc:sldMk cId="673522658" sldId="258"/>
+        </pc:sldMkLst>
+        <pc:spChg chg="mod">
+          <ac:chgData name="Brian Leung" userId="dd50ab1c25e28f6f" providerId="LiveId" clId="{594B7852-E483-4D99-B4A6-A863D3824C6F}" dt="2026-04-27T05:24:54.331" v="1991" actId="20577"/>
+          <ac:spMkLst>
+            <pc:docMk/>
+            <pc:sldMk cId="673522658" sldId="258"/>
+            <ac:spMk id="2" creationId="{0BD9DB4F-7AAA-C425-9BE3-0247A9735E76}"/>
+          </ac:spMkLst>
+        </pc:spChg>
+        <pc:spChg chg="mod">
+          <ac:chgData name="Brian Leung" userId="dd50ab1c25e28f6f" providerId="LiveId" clId="{594B7852-E483-4D99-B4A6-A863D3824C6F}" dt="2026-04-27T05:33:48.116" v="2281" actId="13926"/>
+          <ac:spMkLst>
+            <pc:docMk/>
+            <pc:sldMk cId="673522658" sldId="258"/>
+            <ac:spMk id="3" creationId="{D7C6667B-5F7D-5C3A-FDEF-2A75B2D676EC}"/>
+          </ac:spMkLst>
+        </pc:spChg>
+        <pc:spChg chg="add">
+          <ac:chgData name="Brian Leung" userId="dd50ab1c25e28f6f" providerId="LiveId" clId="{594B7852-E483-4D99-B4A6-A863D3824C6F}" dt="2026-04-23T01:23:54.773" v="1579" actId="26606"/>
+          <ac:spMkLst>
+            <pc:docMk/>
+            <pc:sldMk cId="673522658" sldId="258"/>
+            <ac:spMk id="8" creationId="{A2679492-7988-4050-9056-542444452411}"/>
+          </ac:spMkLst>
+        </pc:spChg>
+        <pc:spChg chg="add">
+          <ac:chgData name="Brian Leung" userId="dd50ab1c25e28f6f" providerId="LiveId" clId="{594B7852-E483-4D99-B4A6-A863D3824C6F}" dt="2026-04-23T01:23:54.773" v="1579" actId="26606"/>
+          <ac:spMkLst>
+            <pc:docMk/>
+            <pc:sldMk cId="673522658" sldId="258"/>
+            <ac:spMk id="10" creationId="{B091B163-7D61-4891-ABCF-5C13D9C418D0}"/>
+          </ac:spMkLst>
+        </pc:spChg>
+        <pc:grpChg chg="add">
+          <ac:chgData name="Brian Leung" userId="dd50ab1c25e28f6f" providerId="LiveId" clId="{594B7852-E483-4D99-B4A6-A863D3824C6F}" dt="2026-04-23T01:23:54.773" v="1579" actId="26606"/>
+          <ac:grpSpMkLst>
+            <pc:docMk/>
+            <pc:sldMk cId="673522658" sldId="258"/>
+            <ac:grpSpMk id="12" creationId="{0474DF76-993E-44DE-AFB0-C416182ACECF}"/>
+          </ac:grpSpMkLst>
+        </pc:grpChg>
+        <pc:cxnChg chg="add">
+          <ac:chgData name="Brian Leung" userId="dd50ab1c25e28f6f" providerId="LiveId" clId="{594B7852-E483-4D99-B4A6-A863D3824C6F}" dt="2026-04-23T01:23:54.773" v="1579" actId="26606"/>
+          <ac:cxnSpMkLst>
+            <pc:docMk/>
+            <pc:sldMk cId="673522658" sldId="258"/>
+            <ac:cxnSpMk id="17" creationId="{C49DA8F6-BCC1-4447-B54C-57856834B94B}"/>
+          </ac:cxnSpMkLst>
+        </pc:cxnChg>
+      </pc:sldChg>
+      <pc:sldChg chg="addSp modSp new mod ord setBg">
+        <pc:chgData name="Brian Leung" userId="dd50ab1c25e28f6f" providerId="LiveId" clId="{594B7852-E483-4D99-B4A6-A863D3824C6F}" dt="2026-04-23T01:39:58.425" v="1765" actId="255"/>
+        <pc:sldMkLst>
+          <pc:docMk/>
+          <pc:sldMk cId="1300409586" sldId="260"/>
+        </pc:sldMkLst>
+        <pc:spChg chg="mod">
+          <ac:chgData name="Brian Leung" userId="dd50ab1c25e28f6f" providerId="LiveId" clId="{594B7852-E483-4D99-B4A6-A863D3824C6F}" dt="2026-04-23T01:25:08.546" v="1595" actId="26606"/>
+          <ac:spMkLst>
+            <pc:docMk/>
+            <pc:sldMk cId="1300409586" sldId="260"/>
+            <ac:spMk id="2" creationId="{DFCEBA88-F571-2523-35CE-809B4D724EBA}"/>
+          </ac:spMkLst>
+        </pc:spChg>
+        <pc:spChg chg="mod">
+          <ac:chgData name="Brian Leung" userId="dd50ab1c25e28f6f" providerId="LiveId" clId="{594B7852-E483-4D99-B4A6-A863D3824C6F}" dt="2026-04-23T01:39:58.425" v="1765" actId="255"/>
+          <ac:spMkLst>
+            <pc:docMk/>
+            <pc:sldMk cId="1300409586" sldId="260"/>
+            <ac:spMk id="3" creationId="{C5F1D996-8675-317C-95EC-2461B305FD46}"/>
+          </ac:spMkLst>
+        </pc:spChg>
+        <pc:spChg chg="add">
+          <ac:chgData name="Brian Leung" userId="dd50ab1c25e28f6f" providerId="LiveId" clId="{594B7852-E483-4D99-B4A6-A863D3824C6F}" dt="2026-04-23T01:25:08.546" v="1595" actId="26606"/>
+          <ac:spMkLst>
+            <pc:docMk/>
+            <pc:sldMk cId="1300409586" sldId="260"/>
+            <ac:spMk id="8" creationId="{A2679492-7988-4050-9056-542444452411}"/>
+          </ac:spMkLst>
+        </pc:spChg>
+        <pc:spChg chg="add">
+          <ac:chgData name="Brian Leung" userId="dd50ab1c25e28f6f" providerId="LiveId" clId="{594B7852-E483-4D99-B4A6-A863D3824C6F}" dt="2026-04-23T01:25:08.546" v="1595" actId="26606"/>
+          <ac:spMkLst>
+            <pc:docMk/>
+            <pc:sldMk cId="1300409586" sldId="260"/>
+            <ac:spMk id="10" creationId="{B091B163-7D61-4891-ABCF-5C13D9C418D0}"/>
+          </ac:spMkLst>
+        </pc:spChg>
+        <pc:grpChg chg="add">
+          <ac:chgData name="Brian Leung" userId="dd50ab1c25e28f6f" providerId="LiveId" clId="{594B7852-E483-4D99-B4A6-A863D3824C6F}" dt="2026-04-23T01:25:08.546" v="1595" actId="26606"/>
+          <ac:grpSpMkLst>
+            <pc:docMk/>
+            <pc:sldMk cId="1300409586" sldId="260"/>
+            <ac:grpSpMk id="12" creationId="{0474DF76-993E-44DE-AFB0-C416182ACECF}"/>
+          </ac:grpSpMkLst>
+        </pc:grpChg>
+        <pc:cxnChg chg="add">
+          <ac:chgData name="Brian Leung" userId="dd50ab1c25e28f6f" providerId="LiveId" clId="{594B7852-E483-4D99-B4A6-A863D3824C6F}" dt="2026-04-23T01:25:08.546" v="1595" actId="26606"/>
+          <ac:cxnSpMkLst>
+            <pc:docMk/>
+            <pc:sldMk cId="1300409586" sldId="260"/>
+            <ac:cxnSpMk id="17" creationId="{C49DA8F6-BCC1-4447-B54C-57856834B94B}"/>
+          </ac:cxnSpMkLst>
+        </pc:cxnChg>
+      </pc:sldChg>
+      <pc:sldChg chg="addSp modSp new mod setBg">
+        <pc:chgData name="Brian Leung" userId="dd50ab1c25e28f6f" providerId="LiveId" clId="{594B7852-E483-4D99-B4A6-A863D3824C6F}" dt="2026-04-27T05:36:04.269" v="2293" actId="113"/>
+        <pc:sldMkLst>
+          <pc:docMk/>
+          <pc:sldMk cId="661758765" sldId="261"/>
+        </pc:sldMkLst>
+        <pc:spChg chg="mod">
+          <ac:chgData name="Brian Leung" userId="dd50ab1c25e28f6f" providerId="LiveId" clId="{594B7852-E483-4D99-B4A6-A863D3824C6F}" dt="2026-04-23T01:25:47.061" v="1597" actId="26606"/>
+          <ac:spMkLst>
+            <pc:docMk/>
+            <pc:sldMk cId="661758765" sldId="261"/>
+            <ac:spMk id="2" creationId="{AA262DF7-1350-9144-7FDD-4F2048302D44}"/>
+          </ac:spMkLst>
+        </pc:spChg>
+        <pc:spChg chg="mod">
+          <ac:chgData name="Brian Leung" userId="dd50ab1c25e28f6f" providerId="LiveId" clId="{594B7852-E483-4D99-B4A6-A863D3824C6F}" dt="2026-04-27T05:36:04.269" v="2293" actId="113"/>
+          <ac:spMkLst>
+            <pc:docMk/>
+            <pc:sldMk cId="661758765" sldId="261"/>
+            <ac:spMk id="3" creationId="{5F9B2380-5F39-4B4C-6167-B05118AC9A94}"/>
+          </ac:spMkLst>
+        </pc:spChg>
+        <pc:spChg chg="add">
+          <ac:chgData name="Brian Leung" userId="dd50ab1c25e28f6f" providerId="LiveId" clId="{594B7852-E483-4D99-B4A6-A863D3824C6F}" dt="2026-04-23T01:25:47.061" v="1597" actId="26606"/>
+          <ac:spMkLst>
+            <pc:docMk/>
+            <pc:sldMk cId="661758765" sldId="261"/>
+            <ac:spMk id="8" creationId="{A2679492-7988-4050-9056-542444452411}"/>
+          </ac:spMkLst>
+        </pc:spChg>
+        <pc:spChg chg="add">
+          <ac:chgData name="Brian Leung" userId="dd50ab1c25e28f6f" providerId="LiveId" clId="{594B7852-E483-4D99-B4A6-A863D3824C6F}" dt="2026-04-23T01:25:47.061" v="1597" actId="26606"/>
+          <ac:spMkLst>
+            <pc:docMk/>
+            <pc:sldMk cId="661758765" sldId="261"/>
+            <ac:spMk id="10" creationId="{B091B163-7D61-4891-ABCF-5C13D9C418D0}"/>
+          </ac:spMkLst>
+        </pc:spChg>
+        <pc:grpChg chg="add">
+          <ac:chgData name="Brian Leung" userId="dd50ab1c25e28f6f" providerId="LiveId" clId="{594B7852-E483-4D99-B4A6-A863D3824C6F}" dt="2026-04-23T01:25:47.061" v="1597" actId="26606"/>
+          <ac:grpSpMkLst>
+            <pc:docMk/>
+            <pc:sldMk cId="661758765" sldId="261"/>
+            <ac:grpSpMk id="12" creationId="{0474DF76-993E-44DE-AFB0-C416182ACECF}"/>
+          </ac:grpSpMkLst>
+        </pc:grpChg>
+        <pc:cxnChg chg="add">
+          <ac:chgData name="Brian Leung" userId="dd50ab1c25e28f6f" providerId="LiveId" clId="{594B7852-E483-4D99-B4A6-A863D3824C6F}" dt="2026-04-23T01:25:47.061" v="1597" actId="26606"/>
+          <ac:cxnSpMkLst>
+            <pc:docMk/>
+            <pc:sldMk cId="661758765" sldId="261"/>
+            <ac:cxnSpMk id="17" creationId="{C49DA8F6-BCC1-4447-B54C-57856834B94B}"/>
+          </ac:cxnSpMkLst>
+        </pc:cxnChg>
+      </pc:sldChg>
+      <pc:sldChg chg="addSp modSp new mod setBg">
+        <pc:chgData name="Brian Leung" userId="dd50ab1c25e28f6f" providerId="LiveId" clId="{594B7852-E483-4D99-B4A6-A863D3824C6F}" dt="2026-04-23T01:40:23.383" v="1768" actId="255"/>
+        <pc:sldMkLst>
+          <pc:docMk/>
+          <pc:sldMk cId="4161823758" sldId="263"/>
+        </pc:sldMkLst>
+        <pc:spChg chg="mod">
+          <ac:chgData name="Brian Leung" userId="dd50ab1c25e28f6f" providerId="LiveId" clId="{594B7852-E483-4D99-B4A6-A863D3824C6F}" dt="2026-04-23T01:25:55.382" v="1598" actId="26606"/>
+          <ac:spMkLst>
+            <pc:docMk/>
+            <pc:sldMk cId="4161823758" sldId="263"/>
+            <ac:spMk id="2" creationId="{C499F0AE-1122-30CD-F1E5-40FECBDCCBF6}"/>
+          </ac:spMkLst>
+        </pc:spChg>
+        <pc:spChg chg="mod">
+          <ac:chgData name="Brian Leung" userId="dd50ab1c25e28f6f" providerId="LiveId" clId="{594B7852-E483-4D99-B4A6-A863D3824C6F}" dt="2026-04-23T01:40:23.383" v="1768" actId="255"/>
+          <ac:spMkLst>
+            <pc:docMk/>
+            <pc:sldMk cId="4161823758" sldId="263"/>
+            <ac:spMk id="3" creationId="{6B74716F-5032-7F1B-225D-D24D3A648559}"/>
+          </ac:spMkLst>
+        </pc:spChg>
+        <pc:spChg chg="add">
+          <ac:chgData name="Brian Leung" userId="dd50ab1c25e28f6f" providerId="LiveId" clId="{594B7852-E483-4D99-B4A6-A863D3824C6F}" dt="2026-04-23T01:25:55.382" v="1598" actId="26606"/>
+          <ac:spMkLst>
+            <pc:docMk/>
+            <pc:sldMk cId="4161823758" sldId="263"/>
+            <ac:spMk id="8" creationId="{A2679492-7988-4050-9056-542444452411}"/>
+          </ac:spMkLst>
+        </pc:spChg>
+        <pc:spChg chg="add">
+          <ac:chgData name="Brian Leung" userId="dd50ab1c25e28f6f" providerId="LiveId" clId="{594B7852-E483-4D99-B4A6-A863D3824C6F}" dt="2026-04-23T01:25:55.382" v="1598" actId="26606"/>
+          <ac:spMkLst>
+            <pc:docMk/>
+            <pc:sldMk cId="4161823758" sldId="263"/>
+            <ac:spMk id="10" creationId="{B091B163-7D61-4891-ABCF-5C13D9C418D0}"/>
+          </ac:spMkLst>
+        </pc:spChg>
+        <pc:grpChg chg="add">
+          <ac:chgData name="Brian Leung" userId="dd50ab1c25e28f6f" providerId="LiveId" clId="{594B7852-E483-4D99-B4A6-A863D3824C6F}" dt="2026-04-23T01:25:55.382" v="1598" actId="26606"/>
+          <ac:grpSpMkLst>
+            <pc:docMk/>
+            <pc:sldMk cId="4161823758" sldId="263"/>
+            <ac:grpSpMk id="12" creationId="{0474DF76-993E-44DE-AFB0-C416182ACECF}"/>
+          </ac:grpSpMkLst>
+        </pc:grpChg>
+        <pc:cxnChg chg="add">
+          <ac:chgData name="Brian Leung" userId="dd50ab1c25e28f6f" providerId="LiveId" clId="{594B7852-E483-4D99-B4A6-A863D3824C6F}" dt="2026-04-23T01:25:55.382" v="1598" actId="26606"/>
+          <ac:cxnSpMkLst>
+            <pc:docMk/>
+            <pc:sldMk cId="4161823758" sldId="263"/>
+            <ac:cxnSpMk id="17" creationId="{C49DA8F6-BCC1-4447-B54C-57856834B94B}"/>
+          </ac:cxnSpMkLst>
+        </pc:cxnChg>
+      </pc:sldChg>
+      <pc:sldChg chg="addSp modSp new mod setBg">
+        <pc:chgData name="Brian Leung" userId="dd50ab1c25e28f6f" providerId="LiveId" clId="{594B7852-E483-4D99-B4A6-A863D3824C6F}" dt="2026-04-27T05:30:17.204" v="2217" actId="20577"/>
+        <pc:sldMkLst>
+          <pc:docMk/>
+          <pc:sldMk cId="3198649171" sldId="266"/>
+        </pc:sldMkLst>
+        <pc:spChg chg="mod">
+          <ac:chgData name="Brian Leung" userId="dd50ab1c25e28f6f" providerId="LiveId" clId="{594B7852-E483-4D99-B4A6-A863D3824C6F}" dt="2026-04-23T01:25:13.537" v="1596" actId="26606"/>
+          <ac:spMkLst>
+            <pc:docMk/>
+            <pc:sldMk cId="3198649171" sldId="266"/>
+            <ac:spMk id="2" creationId="{EA8913EB-587C-811B-B9E1-5DDDCCA75DF9}"/>
+          </ac:spMkLst>
+        </pc:spChg>
+        <pc:spChg chg="mod">
+          <ac:chgData name="Brian Leung" userId="dd50ab1c25e28f6f" providerId="LiveId" clId="{594B7852-E483-4D99-B4A6-A863D3824C6F}" dt="2026-04-27T05:30:17.204" v="2217" actId="20577"/>
+          <ac:spMkLst>
+            <pc:docMk/>
+            <pc:sldMk cId="3198649171" sldId="266"/>
+            <ac:spMk id="3" creationId="{35FAE86B-026A-CDB6-87C0-D4C66A64518A}"/>
+          </ac:spMkLst>
+        </pc:spChg>
+        <pc:spChg chg="add">
+          <ac:chgData name="Brian Leung" userId="dd50ab1c25e28f6f" providerId="LiveId" clId="{594B7852-E483-4D99-B4A6-A863D3824C6F}" dt="2026-04-23T01:25:13.537" v="1596" actId="26606"/>
+          <ac:spMkLst>
+            <pc:docMk/>
+            <pc:sldMk cId="3198649171" sldId="266"/>
+            <ac:spMk id="8" creationId="{A2679492-7988-4050-9056-542444452411}"/>
+          </ac:spMkLst>
+        </pc:spChg>
+        <pc:spChg chg="add">
+          <ac:chgData name="Brian Leung" userId="dd50ab1c25e28f6f" providerId="LiveId" clId="{594B7852-E483-4D99-B4A6-A863D3824C6F}" dt="2026-04-23T01:25:13.537" v="1596" actId="26606"/>
+          <ac:spMkLst>
+            <pc:docMk/>
+            <pc:sldMk cId="3198649171" sldId="266"/>
+            <ac:spMk id="10" creationId="{B091B163-7D61-4891-ABCF-5C13D9C418D0}"/>
+          </ac:spMkLst>
+        </pc:spChg>
+        <pc:grpChg chg="add">
+          <ac:chgData name="Brian Leung" userId="dd50ab1c25e28f6f" providerId="LiveId" clId="{594B7852-E483-4D99-B4A6-A863D3824C6F}" dt="2026-04-23T01:25:13.537" v="1596" actId="26606"/>
+          <ac:grpSpMkLst>
+            <pc:docMk/>
+            <pc:sldMk cId="3198649171" sldId="266"/>
+            <ac:grpSpMk id="12" creationId="{0474DF76-993E-44DE-AFB0-C416182ACECF}"/>
+          </ac:grpSpMkLst>
+        </pc:grpChg>
+        <pc:cxnChg chg="add">
+          <ac:chgData name="Brian Leung" userId="dd50ab1c25e28f6f" providerId="LiveId" clId="{594B7852-E483-4D99-B4A6-A863D3824C6F}" dt="2026-04-23T01:25:13.537" v="1596" actId="26606"/>
+          <ac:cxnSpMkLst>
+            <pc:docMk/>
+            <pc:sldMk cId="3198649171" sldId="266"/>
+            <ac:cxnSpMk id="17" creationId="{C49DA8F6-BCC1-4447-B54C-57856834B94B}"/>
+          </ac:cxnSpMkLst>
+        </pc:cxnChg>
+      </pc:sldChg>
+      <pc:sldChg chg="modSp new mod setBg">
+        <pc:chgData name="Brian Leung" userId="dd50ab1c25e28f6f" providerId="LiveId" clId="{594B7852-E483-4D99-B4A6-A863D3824C6F}" dt="2026-04-23T01:30:56.587" v="1664" actId="207"/>
+        <pc:sldMkLst>
+          <pc:docMk/>
+          <pc:sldMk cId="3060616034" sldId="267"/>
+        </pc:sldMkLst>
+        <pc:spChg chg="mod">
+          <ac:chgData name="Brian Leung" userId="dd50ab1c25e28f6f" providerId="LiveId" clId="{594B7852-E483-4D99-B4A6-A863D3824C6F}" dt="2026-04-23T01:30:52.390" v="1662" actId="207"/>
+          <ac:spMkLst>
+            <pc:docMk/>
+            <pc:sldMk cId="3060616034" sldId="267"/>
+            <ac:spMk id="2" creationId="{E747C0E9-6263-F343-8CAE-52BDB7CB37F7}"/>
+          </ac:spMkLst>
+        </pc:spChg>
+        <pc:spChg chg="mod">
+          <ac:chgData name="Brian Leung" userId="dd50ab1c25e28f6f" providerId="LiveId" clId="{594B7852-E483-4D99-B4A6-A863D3824C6F}" dt="2026-04-23T01:30:50.545" v="1661" actId="207"/>
+          <ac:spMkLst>
+            <pc:docMk/>
+            <pc:sldMk cId="3060616034" sldId="267"/>
+            <ac:spMk id="3" creationId="{369909F5-B89D-6642-6B97-32BE2FE38AB1}"/>
+          </ac:spMkLst>
+        </pc:spChg>
+        <pc:spChg chg="mod">
+          <ac:chgData name="Brian Leung" userId="dd50ab1c25e28f6f" providerId="LiveId" clId="{594B7852-E483-4D99-B4A6-A863D3824C6F}" dt="2026-04-23T01:30:44.915" v="1660" actId="207"/>
+          <ac:spMkLst>
+            <pc:docMk/>
+            <pc:sldMk cId="3060616034" sldId="267"/>
+            <ac:spMk id="4" creationId="{AAC69ED8-1764-9C54-0214-E252F4415E01}"/>
+          </ac:spMkLst>
+        </pc:spChg>
+        <pc:spChg chg="mod">
+          <ac:chgData name="Brian Leung" userId="dd50ab1c25e28f6f" providerId="LiveId" clId="{594B7852-E483-4D99-B4A6-A863D3824C6F}" dt="2026-04-23T01:30:56.587" v="1664" actId="207"/>
+          <ac:spMkLst>
+            <pc:docMk/>
+            <pc:sldMk cId="3060616034" sldId="267"/>
+            <ac:spMk id="5" creationId="{D1126EFB-979A-D09C-B6F2-FB6375659519}"/>
+          </ac:spMkLst>
+        </pc:spChg>
+        <pc:spChg chg="mod">
+          <ac:chgData name="Brian Leung" userId="dd50ab1c25e28f6f" providerId="LiveId" clId="{594B7852-E483-4D99-B4A6-A863D3824C6F}" dt="2026-04-23T01:30:54.693" v="1663" actId="207"/>
+          <ac:spMkLst>
+            <pc:docMk/>
+            <pc:sldMk cId="3060616034" sldId="267"/>
+            <ac:spMk id="6" creationId="{8ABC817B-ED12-4967-97E9-911025C54A12}"/>
+          </ac:spMkLst>
+        </pc:spChg>
+      </pc:sldChg>
+      <pc:sldChg chg="addSp delSp modSp new mod ord setBg">
+        <pc:chgData name="Brian Leung" userId="dd50ab1c25e28f6f" providerId="LiveId" clId="{594B7852-E483-4D99-B4A6-A863D3824C6F}" dt="2026-04-23T01:31:25.984" v="1674" actId="207"/>
+        <pc:sldMkLst>
+          <pc:docMk/>
+          <pc:sldMk cId="4070458052" sldId="268"/>
+        </pc:sldMkLst>
+        <pc:spChg chg="mod">
+          <ac:chgData name="Brian Leung" userId="dd50ab1c25e28f6f" providerId="LiveId" clId="{594B7852-E483-4D99-B4A6-A863D3824C6F}" dt="2026-04-23T01:31:22.287" v="1672" actId="207"/>
+          <ac:spMkLst>
+            <pc:docMk/>
+            <pc:sldMk cId="4070458052" sldId="268"/>
+            <ac:spMk id="2" creationId="{7B0C22F2-3434-2067-2293-B2CF28F9122E}"/>
+          </ac:spMkLst>
+        </pc:spChg>
+        <pc:spChg chg="mod">
+          <ac:chgData name="Brian Leung" userId="dd50ab1c25e28f6f" providerId="LiveId" clId="{594B7852-E483-4D99-B4A6-A863D3824C6F}" dt="2026-04-23T01:31:21.071" v="1671" actId="207"/>
+          <ac:spMkLst>
+            <pc:docMk/>
+            <pc:sldMk cId="4070458052" sldId="268"/>
+            <ac:spMk id="3" creationId="{697B7D82-8B25-197C-9603-52D46196B431}"/>
+          </ac:spMkLst>
+        </pc:spChg>
+        <pc:spChg chg="mod">
+          <ac:chgData name="Brian Leung" userId="dd50ab1c25e28f6f" providerId="LiveId" clId="{594B7852-E483-4D99-B4A6-A863D3824C6F}" dt="2026-04-23T01:31:19.483" v="1670" actId="207"/>
+          <ac:spMkLst>
+            <pc:docMk/>
+            <pc:sldMk cId="4070458052" sldId="268"/>
+            <ac:spMk id="4" creationId="{9E0D237D-26A0-33F8-D603-391640A04E40}"/>
+          </ac:spMkLst>
+        </pc:spChg>
+        <pc:spChg chg="mod">
+          <ac:chgData name="Brian Leung" userId="dd50ab1c25e28f6f" providerId="LiveId" clId="{594B7852-E483-4D99-B4A6-A863D3824C6F}" dt="2026-04-23T01:31:25.984" v="1674" actId="207"/>
+          <ac:spMkLst>
+            <pc:docMk/>
+            <pc:sldMk cId="4070458052" sldId="268"/>
+            <ac:spMk id="5" creationId="{B962D7E0-2145-48C8-6AFF-C24880BE4540}"/>
+          </ac:spMkLst>
+        </pc:spChg>
+        <pc:spChg chg="mod">
+          <ac:chgData name="Brian Leung" userId="dd50ab1c25e28f6f" providerId="LiveId" clId="{594B7852-E483-4D99-B4A6-A863D3824C6F}" dt="2026-04-23T01:31:23.798" v="1673" actId="207"/>
+          <ac:spMkLst>
+            <pc:docMk/>
+            <pc:sldMk cId="4070458052" sldId="268"/>
+            <ac:spMk id="6" creationId="{FC588B1F-E2DE-A10B-F8AC-B1F827070B3B}"/>
+          </ac:spMkLst>
+        </pc:spChg>
+      </pc:sldChg>
+      <pc:sldChg chg="addSp delSp modSp new mod setBg addAnim delAnim modAnim">
+        <pc:chgData name="Brian Leung" userId="dd50ab1c25e28f6f" providerId="LiveId" clId="{594B7852-E483-4D99-B4A6-A863D3824C6F}" dt="2026-04-23T02:10:25.404" v="1931"/>
+        <pc:sldMkLst>
+          <pc:docMk/>
+          <pc:sldMk cId="2019789419" sldId="270"/>
+        </pc:sldMkLst>
+        <pc:spChg chg="mod">
+          <ac:chgData name="Brian Leung" userId="dd50ab1c25e28f6f" providerId="LiveId" clId="{594B7852-E483-4D99-B4A6-A863D3824C6F}" dt="2026-04-23T01:35:54.301" v="1711" actId="6549"/>
+          <ac:spMkLst>
+            <pc:docMk/>
+            <pc:sldMk cId="2019789419" sldId="270"/>
+            <ac:spMk id="2" creationId="{FD179CF0-63EE-3892-9537-90D2B99AF95A}"/>
+          </ac:spMkLst>
+        </pc:spChg>
+        <pc:spChg chg="add mod">
+          <ac:chgData name="Brian Leung" userId="dd50ab1c25e28f6f" providerId="LiveId" clId="{594B7852-E483-4D99-B4A6-A863D3824C6F}" dt="2026-04-23T02:05:28.568" v="1885" actId="14100"/>
+          <ac:spMkLst>
+            <pc:docMk/>
+            <pc:sldMk cId="2019789419" sldId="270"/>
+            <ac:spMk id="17" creationId="{34180256-D810-5332-3501-4E9AC31B1681}"/>
+          </ac:spMkLst>
+        </pc:spChg>
+        <pc:spChg chg="add mod">
+          <ac:chgData name="Brian Leung" userId="dd50ab1c25e28f6f" providerId="LiveId" clId="{594B7852-E483-4D99-B4A6-A863D3824C6F}" dt="2026-04-23T02:05:35.583" v="1887" actId="1076"/>
+          <ac:spMkLst>
+            <pc:docMk/>
+            <pc:sldMk cId="2019789419" sldId="270"/>
+            <ac:spMk id="24" creationId="{253DB302-74EE-D020-59B9-C1A8EBCC311A}"/>
+          </ac:spMkLst>
+        </pc:spChg>
+        <pc:spChg chg="add mod">
+          <ac:chgData name="Brian Leung" userId="dd50ab1c25e28f6f" providerId="LiveId" clId="{594B7852-E483-4D99-B4A6-A863D3824C6F}" dt="2026-04-23T02:07:26.754" v="1897" actId="1076"/>
+          <ac:spMkLst>
+            <pc:docMk/>
+            <pc:sldMk cId="2019789419" sldId="270"/>
+            <ac:spMk id="25" creationId="{D8A7338A-D8BD-75F5-9FF5-0923AAA025F7}"/>
+          </ac:spMkLst>
+        </pc:spChg>
+        <pc:spChg chg="add mod">
+          <ac:chgData name="Brian Leung" userId="dd50ab1c25e28f6f" providerId="LiveId" clId="{594B7852-E483-4D99-B4A6-A863D3824C6F}" dt="2026-04-23T02:07:38.021" v="1899" actId="1076"/>
+          <ac:spMkLst>
+            <pc:docMk/>
+            <pc:sldMk cId="2019789419" sldId="270"/>
+            <ac:spMk id="26" creationId="{D8A7338A-D8BD-75F5-9FF5-0923AAA025F7}"/>
+          </ac:spMkLst>
+        </pc:spChg>
+        <pc:spChg chg="add mod">
+          <ac:chgData name="Brian Leung" userId="dd50ab1c25e28f6f" providerId="LiveId" clId="{594B7852-E483-4D99-B4A6-A863D3824C6F}" dt="2026-04-23T02:08:40.599" v="1914" actId="1076"/>
+          <ac:spMkLst>
+            <pc:docMk/>
+            <pc:sldMk cId="2019789419" sldId="270"/>
+            <ac:spMk id="28" creationId="{520E2675-8D89-C36F-2A3E-859C88BB5A02}"/>
+          </ac:spMkLst>
+        </pc:spChg>
+        <pc:spChg chg="add mod">
+          <ac:chgData name="Brian Leung" userId="dd50ab1c25e28f6f" providerId="LiveId" clId="{594B7852-E483-4D99-B4A6-A863D3824C6F}" dt="2026-04-23T02:08:48.490" v="1916" actId="1076"/>
+          <ac:spMkLst>
+            <pc:docMk/>
+            <pc:sldMk cId="2019789419" sldId="270"/>
+            <ac:spMk id="29" creationId="{5E03D5EC-DE18-B365-862A-290695DF14B4}"/>
+          </ac:spMkLst>
+        </pc:spChg>
+        <pc:graphicFrameChg chg="add mod">
+          <ac:chgData name="Brian Leung" userId="dd50ab1c25e28f6f" providerId="LiveId" clId="{594B7852-E483-4D99-B4A6-A863D3824C6F}" dt="2026-04-23T01:49:35.553" v="1803"/>
+          <ac:graphicFrameMkLst>
+            <pc:docMk/>
+            <pc:sldMk cId="2019789419" sldId="270"/>
+            <ac:graphicFrameMk id="10" creationId="{4532B21B-07A7-BE93-CBB0-48705624C24A}"/>
+          </ac:graphicFrameMkLst>
+        </pc:graphicFrameChg>
+        <pc:graphicFrameChg chg="add mod">
+          <ac:chgData name="Brian Leung" userId="dd50ab1c25e28f6f" providerId="LiveId" clId="{594B7852-E483-4D99-B4A6-A863D3824C6F}" dt="2026-04-23T01:49:15.625" v="1796"/>
+          <ac:graphicFrameMkLst>
+            <pc:docMk/>
+            <pc:sldMk cId="2019789419" sldId="270"/>
+            <ac:graphicFrameMk id="16" creationId="{C988B004-02A0-CBFB-C3CB-3182353DBC84}"/>
+          </ac:graphicFrameMkLst>
+        </pc:graphicFrameChg>
+      </pc:sldChg>
+      <pc:sldChg chg="addSp modSp new mod setBg">
+        <pc:chgData name="Brian Leung" userId="dd50ab1c25e28f6f" providerId="LiveId" clId="{594B7852-E483-4D99-B4A6-A863D3824C6F}" dt="2026-04-23T01:31:33.159" v="1684" actId="20577"/>
+        <pc:sldMkLst>
+          <pc:docMk/>
+          <pc:sldMk cId="2036977824" sldId="273"/>
+        </pc:sldMkLst>
+        <pc:spChg chg="mod">
+          <ac:chgData name="Brian Leung" userId="dd50ab1c25e28f6f" providerId="LiveId" clId="{594B7852-E483-4D99-B4A6-A863D3824C6F}" dt="2026-04-23T01:31:33.159" v="1684" actId="20577"/>
+          <ac:spMkLst>
+            <pc:docMk/>
+            <pc:sldMk cId="2036977824" sldId="273"/>
+            <ac:spMk id="2" creationId="{C1ACBFE9-46A6-D2E3-E057-8FD4C54B61DB}"/>
+          </ac:spMkLst>
+        </pc:spChg>
+        <pc:spChg chg="add">
+          <ac:chgData name="Brian Leung" userId="dd50ab1c25e28f6f" providerId="LiveId" clId="{594B7852-E483-4D99-B4A6-A863D3824C6F}" dt="2026-04-23T01:24:31.005" v="1591" actId="26606"/>
+          <ac:spMkLst>
+            <pc:docMk/>
+            <pc:sldMk cId="2036977824" sldId="273"/>
+            <ac:spMk id="7" creationId="{8F9CBE3F-79A8-4F8F-88D9-DAD03D0D281F}"/>
+          </ac:spMkLst>
+        </pc:spChg>
+        <pc:spChg chg="add">
+          <ac:chgData name="Brian Leung" userId="dd50ab1c25e28f6f" providerId="LiveId" clId="{594B7852-E483-4D99-B4A6-A863D3824C6F}" dt="2026-04-23T01:24:31.005" v="1591" actId="26606"/>
+          <ac:spMkLst>
+            <pc:docMk/>
+            <pc:sldMk cId="2036977824" sldId="273"/>
+            <ac:spMk id="9" creationId="{508BEF50-7B1E-49A4-BC19-5F4F1D755E64}"/>
+          </ac:spMkLst>
+        </pc:spChg>
+        <pc:spChg chg="add">
+          <ac:chgData name="Brian Leung" userId="dd50ab1c25e28f6f" providerId="LiveId" clId="{594B7852-E483-4D99-B4A6-A863D3824C6F}" dt="2026-04-23T01:24:31.005" v="1591" actId="26606"/>
+          <ac:spMkLst>
+            <pc:docMk/>
+            <pc:sldMk cId="2036977824" sldId="273"/>
+            <ac:spMk id="11" creationId="{C5CB530E-515E-412C-9DF1-5F8FFBD6F383}"/>
+          </ac:spMkLst>
+        </pc:spChg>
+        <pc:spChg chg="add">
+          <ac:chgData name="Brian Leung" userId="dd50ab1c25e28f6f" providerId="LiveId" clId="{594B7852-E483-4D99-B4A6-A863D3824C6F}" dt="2026-04-23T01:24:31.005" v="1591" actId="26606"/>
+          <ac:spMkLst>
+            <pc:docMk/>
+            <pc:sldMk cId="2036977824" sldId="273"/>
+            <ac:spMk id="13" creationId="{AEA7509D-F04F-40CB-A0B3-EEF16499CC9F}"/>
+          </ac:spMkLst>
+        </pc:spChg>
+        <pc:spChg chg="add">
+          <ac:chgData name="Brian Leung" userId="dd50ab1c25e28f6f" providerId="LiveId" clId="{594B7852-E483-4D99-B4A6-A863D3824C6F}" dt="2026-04-23T01:24:31.005" v="1591" actId="26606"/>
+          <ac:spMkLst>
+            <pc:docMk/>
+            <pc:sldMk cId="2036977824" sldId="273"/>
+            <ac:spMk id="15" creationId="{C39ADB8F-D187-49D7-BDCF-C1B6DC727068}"/>
+          </ac:spMkLst>
+        </pc:spChg>
+        <pc:spChg chg="add">
+          <ac:chgData name="Brian Leung" userId="dd50ab1c25e28f6f" providerId="LiveId" clId="{594B7852-E483-4D99-B4A6-A863D3824C6F}" dt="2026-04-23T01:24:31.005" v="1591" actId="26606"/>
+          <ac:spMkLst>
+            <pc:docMk/>
+            <pc:sldMk cId="2036977824" sldId="273"/>
+            <ac:spMk id="17" creationId="{712D4376-A578-4FF1-94FC-245E7A6A489F}"/>
+          </ac:spMkLst>
+        </pc:spChg>
+        <pc:spChg chg="add">
+          <ac:chgData name="Brian Leung" userId="dd50ab1c25e28f6f" providerId="LiveId" clId="{594B7852-E483-4D99-B4A6-A863D3824C6F}" dt="2026-04-23T01:24:31.005" v="1591" actId="26606"/>
+          <ac:spMkLst>
+            <pc:docMk/>
+            <pc:sldMk cId="2036977824" sldId="273"/>
+            <ac:spMk id="19" creationId="{3FBAD350-5664-4811-A208-657FB882D350}"/>
+          </ac:spMkLst>
+        </pc:spChg>
+        <pc:cxnChg chg="add">
+          <ac:chgData name="Brian Leung" userId="dd50ab1c25e28f6f" providerId="LiveId" clId="{594B7852-E483-4D99-B4A6-A863D3824C6F}" dt="2026-04-23T01:24:31.005" v="1591" actId="26606"/>
+          <ac:cxnSpMkLst>
+            <pc:docMk/>
+            <pc:sldMk cId="2036977824" sldId="273"/>
+            <ac:cxnSpMk id="21" creationId="{56020367-4FD5-4596-8E10-C5F095CD8DBF}"/>
+          </ac:cxnSpMkLst>
+        </pc:cxnChg>
+      </pc:sldChg>
+      <pc:sldChg chg="modSp add mod ord">
+        <pc:chgData name="Brian Leung" userId="dd50ab1c25e28f6f" providerId="LiveId" clId="{594B7852-E483-4D99-B4A6-A863D3824C6F}" dt="2026-04-23T01:35:31.229" v="1710" actId="20577"/>
+        <pc:sldMkLst>
+          <pc:docMk/>
+          <pc:sldMk cId="867387903" sldId="274"/>
+        </pc:sldMkLst>
+        <pc:spChg chg="mod">
+          <ac:chgData name="Brian Leung" userId="dd50ab1c25e28f6f" providerId="LiveId" clId="{594B7852-E483-4D99-B4A6-A863D3824C6F}" dt="2026-04-23T01:35:31.229" v="1710" actId="20577"/>
+          <ac:spMkLst>
+            <pc:docMk/>
+            <pc:sldMk cId="867387903" sldId="274"/>
+            <ac:spMk id="2" creationId="{63458FD0-45A5-F03A-A8DC-CC712B178667}"/>
+          </ac:spMkLst>
+        </pc:spChg>
+      </pc:sldChg>
+      <pc:sldChg chg="addSp modSp new mod setBg">
+        <pc:chgData name="Brian Leung" userId="dd50ab1c25e28f6f" providerId="LiveId" clId="{594B7852-E483-4D99-B4A6-A863D3824C6F}" dt="2026-04-23T01:37:03.872" v="1735"/>
+        <pc:sldMkLst>
+          <pc:docMk/>
+          <pc:sldMk cId="418326935" sldId="275"/>
+        </pc:sldMkLst>
+        <pc:graphicFrameChg chg="add mod">
+          <ac:chgData name="Brian Leung" userId="dd50ab1c25e28f6f" providerId="LiveId" clId="{594B7852-E483-4D99-B4A6-A863D3824C6F}" dt="2026-04-23T01:37:03.872" v="1735"/>
+          <ac:graphicFrameMkLst>
+            <pc:docMk/>
+            <pc:sldMk cId="418326935" sldId="275"/>
+            <ac:graphicFrameMk id="2" creationId="{9A3DBBBA-4D5E-76C1-B3FE-45B02DDB9119}"/>
+          </ac:graphicFrameMkLst>
+        </pc:graphicFrameChg>
+      </pc:sldChg>
+      <pc:sldChg chg="addSp delSp modSp new mod setBg">
+        <pc:chgData name="Brian Leung" userId="dd50ab1c25e28f6f" providerId="LiveId" clId="{594B7852-E483-4D99-B4A6-A863D3824C6F}" dt="2026-04-23T03:41:02.966" v="1987" actId="1076"/>
+        <pc:sldMkLst>
+          <pc:docMk/>
+          <pc:sldMk cId="248815995" sldId="276"/>
+        </pc:sldMkLst>
+        <pc:spChg chg="add mod">
+          <ac:chgData name="Brian Leung" userId="dd50ab1c25e28f6f" providerId="LiveId" clId="{594B7852-E483-4D99-B4A6-A863D3824C6F}" dt="2026-04-23T03:41:02.966" v="1987" actId="1076"/>
+          <ac:spMkLst>
+            <pc:docMk/>
+            <pc:sldMk cId="248815995" sldId="276"/>
+            <ac:spMk id="2" creationId="{925135EF-29AF-C2A1-C7A8-D207017ECA38}"/>
+          </ac:spMkLst>
+        </pc:spChg>
+        <pc:graphicFrameChg chg="add mod">
+          <ac:chgData name="Brian Leung" userId="dd50ab1c25e28f6f" providerId="LiveId" clId="{594B7852-E483-4D99-B4A6-A863D3824C6F}" dt="2026-04-23T01:38:00.446" v="1750"/>
+          <ac:graphicFrameMkLst>
+            <pc:docMk/>
+            <pc:sldMk cId="248815995" sldId="276"/>
+            <ac:graphicFrameMk id="4" creationId="{F976CDE1-93EF-DC7E-A6D4-9A85FE031938}"/>
+          </ac:graphicFrameMkLst>
+        </pc:graphicFrameChg>
+      </pc:sldChg>
+      <pc:sldChg chg="addSp modSp new mod setBg">
+        <pc:chgData name="Brian Leung" userId="dd50ab1c25e28f6f" providerId="LiveId" clId="{594B7852-E483-4D99-B4A6-A863D3824C6F}" dt="2026-04-27T05:34:50.463" v="2287" actId="13926"/>
+        <pc:sldMkLst>
+          <pc:docMk/>
+          <pc:sldMk cId="2211161044" sldId="277"/>
+        </pc:sldMkLst>
+        <pc:spChg chg="mod">
+          <ac:chgData name="Brian Leung" userId="dd50ab1c25e28f6f" providerId="LiveId" clId="{594B7852-E483-4D99-B4A6-A863D3824C6F}" dt="2026-04-27T05:28:24.180" v="2192" actId="26606"/>
+          <ac:spMkLst>
+            <pc:docMk/>
+            <pc:sldMk cId="2211161044" sldId="277"/>
+            <ac:spMk id="2" creationId="{4B890354-05BA-BDCC-A53D-30910FAC8033}"/>
+          </ac:spMkLst>
+        </pc:spChg>
+        <pc:spChg chg="mod">
+          <ac:chgData name="Brian Leung" userId="dd50ab1c25e28f6f" providerId="LiveId" clId="{594B7852-E483-4D99-B4A6-A863D3824C6F}" dt="2026-04-27T05:34:50.463" v="2287" actId="13926"/>
+          <ac:spMkLst>
+            <pc:docMk/>
+            <pc:sldMk cId="2211161044" sldId="277"/>
+            <ac:spMk id="3" creationId="{949F9A3F-FB69-67D6-F1C9-188A0DB4488B}"/>
+          </ac:spMkLst>
+        </pc:spChg>
+        <pc:spChg chg="add">
+          <ac:chgData name="Brian Leung" userId="dd50ab1c25e28f6f" providerId="LiveId" clId="{594B7852-E483-4D99-B4A6-A863D3824C6F}" dt="2026-04-27T05:28:24.180" v="2192" actId="26606"/>
+          <ac:spMkLst>
+            <pc:docMk/>
+            <pc:sldMk cId="2211161044" sldId="277"/>
+            <ac:spMk id="8" creationId="{A2679492-7988-4050-9056-542444452411}"/>
+          </ac:spMkLst>
+        </pc:spChg>
+        <pc:spChg chg="add">
+          <ac:chgData name="Brian Leung" userId="dd50ab1c25e28f6f" providerId="LiveId" clId="{594B7852-E483-4D99-B4A6-A863D3824C6F}" dt="2026-04-27T05:28:24.180" v="2192" actId="26606"/>
+          <ac:spMkLst>
+            <pc:docMk/>
+            <pc:sldMk cId="2211161044" sldId="277"/>
+            <ac:spMk id="10" creationId="{B091B163-7D61-4891-ABCF-5C13D9C418D0}"/>
+          </ac:spMkLst>
+        </pc:spChg>
+        <pc:grpChg chg="add">
+          <ac:chgData name="Brian Leung" userId="dd50ab1c25e28f6f" providerId="LiveId" clId="{594B7852-E483-4D99-B4A6-A863D3824C6F}" dt="2026-04-27T05:28:24.180" v="2192" actId="26606"/>
+          <ac:grpSpMkLst>
+            <pc:docMk/>
+            <pc:sldMk cId="2211161044" sldId="277"/>
+            <ac:grpSpMk id="12" creationId="{0474DF76-993E-44DE-AFB0-C416182ACECF}"/>
+          </ac:grpSpMkLst>
+        </pc:grpChg>
+        <pc:cxnChg chg="add">
+          <ac:chgData name="Brian Leung" userId="dd50ab1c25e28f6f" providerId="LiveId" clId="{594B7852-E483-4D99-B4A6-A863D3824C6F}" dt="2026-04-27T05:28:24.180" v="2192" actId="26606"/>
+          <ac:cxnSpMkLst>
+            <pc:docMk/>
+            <pc:sldMk cId="2211161044" sldId="277"/>
+            <ac:cxnSpMk id="17" creationId="{C49DA8F6-BCC1-4447-B54C-57856834B94B}"/>
+          </ac:cxnSpMkLst>
+        </pc:cxnChg>
+      </pc:sldChg>
+      <pc:sldChg chg="delSp add del setBg delDesignElem">
+        <pc:chgData name="Brian Leung" userId="dd50ab1c25e28f6f" providerId="LiveId" clId="{594B7852-E483-4D99-B4A6-A863D3824C6F}" dt="2026-04-27T05:28:06.765" v="2188" actId="47"/>
+        <pc:sldMkLst>
+          <pc:docMk/>
+          <pc:sldMk cId="466888186" sldId="278"/>
+        </pc:sldMkLst>
+        <pc:spChg chg="del">
+          <ac:chgData name="Brian Leung" userId="dd50ab1c25e28f6f" providerId="LiveId" clId="{594B7852-E483-4D99-B4A6-A863D3824C6F}" dt="2026-04-27T05:28:05.094" v="2187"/>
+          <ac:spMkLst>
+            <pc:docMk/>
+            <pc:sldMk cId="466888186" sldId="278"/>
+            <ac:spMk id="8" creationId="{ACA6BAA5-2448-10B7-95ED-0580F8B2FCC9}"/>
+          </ac:spMkLst>
+        </pc:spChg>
+        <pc:spChg chg="del">
+          <ac:chgData name="Brian Leung" userId="dd50ab1c25e28f6f" providerId="LiveId" clId="{594B7852-E483-4D99-B4A6-A863D3824C6F}" dt="2026-04-27T05:28:05.094" v="2187"/>
+          <ac:spMkLst>
+            <pc:docMk/>
+            <pc:sldMk cId="466888186" sldId="278"/>
+            <ac:spMk id="10" creationId="{943128AB-B2CB-EB3E-1DC2-8C069783CFE6}"/>
+          </ac:spMkLst>
+        </pc:spChg>
+        <pc:grpChg chg="del">
+          <ac:chgData name="Brian Leung" userId="dd50ab1c25e28f6f" providerId="LiveId" clId="{594B7852-E483-4D99-B4A6-A863D3824C6F}" dt="2026-04-27T05:28:05.094" v="2187"/>
+          <ac:grpSpMkLst>
+            <pc:docMk/>
+            <pc:sldMk cId="466888186" sldId="278"/>
+            <ac:grpSpMk id="12" creationId="{F9E77247-0ED4-3811-E70B-A4E22186B31C}"/>
+          </ac:grpSpMkLst>
+        </pc:grpChg>
+        <pc:cxnChg chg="del">
+          <ac:chgData name="Brian Leung" userId="dd50ab1c25e28f6f" providerId="LiveId" clId="{594B7852-E483-4D99-B4A6-A863D3824C6F}" dt="2026-04-27T05:28:05.094" v="2187"/>
+          <ac:cxnSpMkLst>
+            <pc:docMk/>
+            <pc:sldMk cId="466888186" sldId="278"/>
+            <ac:cxnSpMk id="17" creationId="{26638672-0DB6-F6AE-D0C2-9010465693B2}"/>
+          </ac:cxnSpMkLst>
+        </pc:cxnChg>
+      </pc:sldChg>
+      <pc:sldChg chg="addSp delSp add del setBg delDesignElem">
+        <pc:chgData name="Brian Leung" userId="dd50ab1c25e28f6f" providerId="LiveId" clId="{594B7852-E483-4D99-B4A6-A863D3824C6F}" dt="2026-04-27T05:28:13.637" v="2191"/>
+        <pc:sldMkLst>
+          <pc:docMk/>
+          <pc:sldMk cId="1837668935" sldId="278"/>
+        </pc:sldMkLst>
+        <pc:spChg chg="add del">
+          <ac:chgData name="Brian Leung" userId="dd50ab1c25e28f6f" providerId="LiveId" clId="{594B7852-E483-4D99-B4A6-A863D3824C6F}" dt="2026-04-27T05:28:13.637" v="2191"/>
+          <ac:spMkLst>
+            <pc:docMk/>
+            <pc:sldMk cId="1837668935" sldId="278"/>
+            <ac:spMk id="8" creationId="{F8C1AB38-0DAA-3C69-2E10-8FD80F4812C4}"/>
+          </ac:spMkLst>
+        </pc:spChg>
+        <pc:spChg chg="add del">
+          <ac:chgData name="Brian Leung" userId="dd50ab1c25e28f6f" providerId="LiveId" clId="{594B7852-E483-4D99-B4A6-A863D3824C6F}" dt="2026-04-27T05:28:13.637" v="2191"/>
+          <ac:spMkLst>
+            <pc:docMk/>
+            <pc:sldMk cId="1837668935" sldId="278"/>
+            <ac:spMk id="10" creationId="{DDC47F6B-EFDB-39A5-6EA1-917F94B1C90C}"/>
+          </ac:spMkLst>
+        </pc:spChg>
+        <pc:grpChg chg="add del">
+          <ac:chgData name="Brian Leung" userId="dd50ab1c25e28f6f" providerId="LiveId" clId="{594B7852-E483-4D99-B4A6-A863D3824C6F}" dt="2026-04-27T05:28:13.637" v="2191"/>
+          <ac:grpSpMkLst>
+            <pc:docMk/>
+            <pc:sldMk cId="1837668935" sldId="278"/>
+            <ac:grpSpMk id="12" creationId="{67110731-40C9-4B1F-18E6-FEB87E5F67FB}"/>
+          </ac:grpSpMkLst>
+        </pc:grpChg>
+        <pc:cxnChg chg="add del">
+          <ac:chgData name="Brian Leung" userId="dd50ab1c25e28f6f" providerId="LiveId" clId="{594B7852-E483-4D99-B4A6-A863D3824C6F}" dt="2026-04-27T05:28:13.637" v="2191"/>
+          <ac:cxnSpMkLst>
+            <pc:docMk/>
+            <pc:sldMk cId="1837668935" sldId="278"/>
+            <ac:cxnSpMk id="17" creationId="{9CA37AB4-6CA1-1E5E-DE9F-3E08028D7AFB}"/>
+          </ac:cxnSpMkLst>
+        </pc:cxnChg>
+      </pc:sldChg>
+      <pc:sldChg chg="delSp add del setBg delDesignElem">
+        <pc:chgData name="Brian Leung" userId="dd50ab1c25e28f6f" providerId="LiveId" clId="{594B7852-E483-4D99-B4A6-A863D3824C6F}" dt="2026-04-27T05:27:58.217" v="2185" actId="47"/>
+        <pc:sldMkLst>
+          <pc:docMk/>
+          <pc:sldMk cId="2965356838" sldId="278"/>
+        </pc:sldMkLst>
+        <pc:spChg chg="del">
+          <ac:chgData name="Brian Leung" userId="dd50ab1c25e28f6f" providerId="LiveId" clId="{594B7852-E483-4D99-B4A6-A863D3824C6F}" dt="2026-04-27T05:27:44.726" v="2184"/>
+          <ac:spMkLst>
+            <pc:docMk/>
+            <pc:sldMk cId="2965356838" sldId="278"/>
+            <ac:spMk id="8" creationId="{80FF6D08-93C9-1FD8-AAE2-94A55D0D2A90}"/>
+          </ac:spMkLst>
+        </pc:spChg>
+        <pc:spChg chg="del">
+          <ac:chgData name="Brian Leung" userId="dd50ab1c25e28f6f" providerId="LiveId" clId="{594B7852-E483-4D99-B4A6-A863D3824C6F}" dt="2026-04-27T05:27:44.726" v="2184"/>
+          <ac:spMkLst>
+            <pc:docMk/>
+            <pc:sldMk cId="2965356838" sldId="278"/>
+            <ac:spMk id="10" creationId="{072A2F05-EA88-5300-755B-06451B15C764}"/>
+          </ac:spMkLst>
+        </pc:spChg>
+        <pc:grpChg chg="del">
+          <ac:chgData name="Brian Leung" userId="dd50ab1c25e28f6f" providerId="LiveId" clId="{594B7852-E483-4D99-B4A6-A863D3824C6F}" dt="2026-04-27T05:27:44.726" v="2184"/>
+          <ac:grpSpMkLst>
+            <pc:docMk/>
+            <pc:sldMk cId="2965356838" sldId="278"/>
+            <ac:grpSpMk id="12" creationId="{62D80148-0497-112B-BFC2-77D4CBE8E007}"/>
+          </ac:grpSpMkLst>
+        </pc:grpChg>
+        <pc:cxnChg chg="del">
+          <ac:chgData name="Brian Leung" userId="dd50ab1c25e28f6f" providerId="LiveId" clId="{594B7852-E483-4D99-B4A6-A863D3824C6F}" dt="2026-04-27T05:27:44.726" v="2184"/>
+          <ac:cxnSpMkLst>
+            <pc:docMk/>
+            <pc:sldMk cId="2965356838" sldId="278"/>
+            <ac:cxnSpMk id="17" creationId="{90D097A9-F2B2-F952-0926-8D3643B42F0A}"/>
+          </ac:cxnSpMkLst>
+        </pc:cxnChg>
+      </pc:sldChg>
+    </pc:docChg>
+  </pc:docChgLst>
+</pc:chgInfo>
 </file>
 
 <file path=ppt/charts/chart1.xml><?xml version="1.0" encoding="utf-8"?>
@@ -4477,7 +5331,7 @@
           <a:p>
             <a:fld id="{BE6D9CDD-3787-4722-9068-78494C9B6687}" type="datetimeFigureOut">
               <a:rPr lang="en-US" smtClean="0"/>
-              <a:t>4/22/2026</a:t>
+              <a:t>4/26/2026</a:t>
             </a:fld>
             <a:endParaRPr lang="en-US"/>
           </a:p>
@@ -4809,7 +5663,7 @@
           <a:p>
             <a:fld id="{4D859B5E-42A0-464D-84BC-24F271242FAD}" type="slidenum">
               <a:rPr lang="en-US" smtClean="0"/>
-              <a:t>4</a:t>
+              <a:t>5</a:t>
             </a:fld>
             <a:endParaRPr lang="en-US"/>
           </a:p>
@@ -4893,7 +5747,7 @@
           <a:p>
             <a:fld id="{4D859B5E-42A0-464D-84BC-24F271242FAD}" type="slidenum">
               <a:rPr lang="en-US" smtClean="0"/>
-              <a:t>6</a:t>
+              <a:t>7</a:t>
             </a:fld>
             <a:endParaRPr lang="en-US"/>
           </a:p>
@@ -4977,7 +5831,7 @@
           <a:p>
             <a:fld id="{4D859B5E-42A0-464D-84BC-24F271242FAD}" type="slidenum">
               <a:rPr lang="en-US" smtClean="0"/>
-              <a:t>11</a:t>
+              <a:t>12</a:t>
             </a:fld>
             <a:endParaRPr lang="en-US"/>
           </a:p>
@@ -5143,7 +5997,7 @@
           <a:p>
             <a:fld id="{FEFA4A9B-99ED-48EA-88D1-560238569F6F}" type="datetimeFigureOut">
               <a:rPr lang="en-US" smtClean="0"/>
-              <a:t>4/22/2026</a:t>
+              <a:t>4/26/2026</a:t>
             </a:fld>
             <a:endParaRPr lang="en-US"/>
           </a:p>
@@ -5341,7 +6195,7 @@
           <a:p>
             <a:fld id="{FEFA4A9B-99ED-48EA-88D1-560238569F6F}" type="datetimeFigureOut">
               <a:rPr lang="en-US" smtClean="0"/>
-              <a:t>4/22/2026</a:t>
+              <a:t>4/26/2026</a:t>
             </a:fld>
             <a:endParaRPr lang="en-US"/>
           </a:p>
@@ -5549,7 +6403,7 @@
           <a:p>
             <a:fld id="{FEFA4A9B-99ED-48EA-88D1-560238569F6F}" type="datetimeFigureOut">
               <a:rPr lang="en-US" smtClean="0"/>
-              <a:t>4/22/2026</a:t>
+              <a:t>4/26/2026</a:t>
             </a:fld>
             <a:endParaRPr lang="en-US"/>
           </a:p>
@@ -5747,7 +6601,7 @@
           <a:p>
             <a:fld id="{FEFA4A9B-99ED-48EA-88D1-560238569F6F}" type="datetimeFigureOut">
               <a:rPr lang="en-US" smtClean="0"/>
-              <a:t>4/22/2026</a:t>
+              <a:t>4/26/2026</a:t>
             </a:fld>
             <a:endParaRPr lang="en-US"/>
           </a:p>
@@ -6022,7 +6876,7 @@
           <a:p>
             <a:fld id="{FEFA4A9B-99ED-48EA-88D1-560238569F6F}" type="datetimeFigureOut">
               <a:rPr lang="en-US" smtClean="0"/>
-              <a:t>4/22/2026</a:t>
+              <a:t>4/26/2026</a:t>
             </a:fld>
             <a:endParaRPr lang="en-US"/>
           </a:p>
@@ -6287,7 +7141,7 @@
           <a:p>
             <a:fld id="{FEFA4A9B-99ED-48EA-88D1-560238569F6F}" type="datetimeFigureOut">
               <a:rPr lang="en-US" smtClean="0"/>
-              <a:t>4/22/2026</a:t>
+              <a:t>4/26/2026</a:t>
             </a:fld>
             <a:endParaRPr lang="en-US"/>
           </a:p>
@@ -6699,7 +7553,7 @@
           <a:p>
             <a:fld id="{FEFA4A9B-99ED-48EA-88D1-560238569F6F}" type="datetimeFigureOut">
               <a:rPr lang="en-US" smtClean="0"/>
-              <a:t>4/22/2026</a:t>
+              <a:t>4/26/2026</a:t>
             </a:fld>
             <a:endParaRPr lang="en-US"/>
           </a:p>
@@ -6840,7 +7694,7 @@
           <a:p>
             <a:fld id="{FEFA4A9B-99ED-48EA-88D1-560238569F6F}" type="datetimeFigureOut">
               <a:rPr lang="en-US" smtClean="0"/>
-              <a:t>4/22/2026</a:t>
+              <a:t>4/26/2026</a:t>
             </a:fld>
             <a:endParaRPr lang="en-US"/>
           </a:p>
@@ -6953,7 +7807,7 @@
           <a:p>
             <a:fld id="{FEFA4A9B-99ED-48EA-88D1-560238569F6F}" type="datetimeFigureOut">
               <a:rPr lang="en-US" smtClean="0"/>
-              <a:t>4/22/2026</a:t>
+              <a:t>4/26/2026</a:t>
             </a:fld>
             <a:endParaRPr lang="en-US"/>
           </a:p>
@@ -7264,7 +8118,7 @@
           <a:p>
             <a:fld id="{FEFA4A9B-99ED-48EA-88D1-560238569F6F}" type="datetimeFigureOut">
               <a:rPr lang="en-US" smtClean="0"/>
-              <a:t>4/22/2026</a:t>
+              <a:t>4/26/2026</a:t>
             </a:fld>
             <a:endParaRPr lang="en-US"/>
           </a:p>
@@ -7552,7 +8406,7 @@
           <a:p>
             <a:fld id="{FEFA4A9B-99ED-48EA-88D1-560238569F6F}" type="datetimeFigureOut">
               <a:rPr lang="en-US" smtClean="0"/>
-              <a:t>4/22/2026</a:t>
+              <a:t>4/26/2026</a:t>
             </a:fld>
             <a:endParaRPr lang="en-US"/>
           </a:p>
@@ -7793,7 +8647,7 @@
           <a:p>
             <a:fld id="{FEFA4A9B-99ED-48EA-88D1-560238569F6F}" type="datetimeFigureOut">
               <a:rPr lang="en-US" smtClean="0"/>
-              <a:t>4/22/2026</a:t>
+              <a:t>4/26/2026</a:t>
             </a:fld>
             <a:endParaRPr lang="en-US"/>
           </a:p>
@@ -9609,6 +10463,80 @@
       </p:grpSpPr>
       <p:graphicFrame>
         <p:nvGraphicFramePr>
+          <p:cNvPr id="2" name="Chart 1">
+            <a:extLst>
+              <a:ext uri="{FF2B5EF4-FFF2-40B4-BE49-F238E27FC236}">
+                <a16:creationId xmlns:a16="http://schemas.microsoft.com/office/drawing/2014/main" id="{9A3DBBBA-4D5E-76C1-B3FE-45B02DDB9119}"/>
+              </a:ext>
+            </a:extLst>
+          </p:cNvPr>
+          <p:cNvGraphicFramePr>
+            <a:graphicFrameLocks/>
+          </p:cNvGraphicFramePr>
+          <p:nvPr>
+            <p:extLst>
+              <p:ext uri="{D42A27DB-BD31-4B8C-83A1-F6EECF244321}">
+                <p14:modId xmlns:p14="http://schemas.microsoft.com/office/powerpoint/2010/main" val="2951281701"/>
+              </p:ext>
+            </p:extLst>
+          </p:nvPr>
+        </p:nvGraphicFramePr>
+        <p:xfrm>
+          <a:off x="643467" y="643467"/>
+          <a:ext cx="10905066" cy="5571066"/>
+        </p:xfrm>
+        <a:graphic>
+          <a:graphicData uri="http://schemas.openxmlformats.org/drawingml/2006/chart">
+            <c:chart xmlns:c="http://schemas.openxmlformats.org/drawingml/2006/chart" xmlns:r="http://schemas.openxmlformats.org/officeDocument/2006/relationships" r:id="rId3"/>
+          </a:graphicData>
+        </a:graphic>
+      </p:graphicFrame>
+    </p:spTree>
+    <p:extLst>
+      <p:ext uri="{BB962C8B-B14F-4D97-AF65-F5344CB8AC3E}">
+        <p14:creationId xmlns:p14="http://schemas.microsoft.com/office/powerpoint/2010/main" val="418326935"/>
+      </p:ext>
+    </p:extLst>
+  </p:cSld>
+  <p:clrMapOvr>
+    <a:masterClrMapping/>
+  </p:clrMapOvr>
+</p:sld>
+</file>
+
+<file path=ppt/slides/slide11.xml><?xml version="1.0" encoding="utf-8"?>
+<p:sld xmlns:a="http://schemas.openxmlformats.org/drawingml/2006/main" xmlns:r="http://schemas.openxmlformats.org/officeDocument/2006/relationships" xmlns:p="http://schemas.openxmlformats.org/presentationml/2006/main">
+  <p:cSld>
+    <p:bg>
+      <p:bgPr>
+        <a:blipFill dpi="0" rotWithShape="1">
+          <a:blip r:embed="rId2">
+            <a:lum/>
+          </a:blip>
+          <a:srcRect/>
+          <a:stretch>
+            <a:fillRect/>
+          </a:stretch>
+        </a:blipFill>
+        <a:effectLst/>
+      </p:bgPr>
+    </p:bg>
+    <p:spTree>
+      <p:nvGrpSpPr>
+        <p:cNvPr id="1" name=""/>
+        <p:cNvGrpSpPr/>
+        <p:nvPr/>
+      </p:nvGrpSpPr>
+      <p:grpSpPr>
+        <a:xfrm>
+          <a:off x="0" y="0"/>
+          <a:ext cx="0" cy="0"/>
+          <a:chOff x="0" y="0"/>
+          <a:chExt cx="0" cy="0"/>
+        </a:xfrm>
+      </p:grpSpPr>
+      <p:graphicFrame>
+        <p:nvGraphicFramePr>
           <p:cNvPr id="4" name="Chart 3">
             <a:extLst>
               <a:ext uri="{FF2B5EF4-FFF2-40B4-BE49-F238E27FC236}">
@@ -9711,7 +10639,7 @@
 </p:sld>
 </file>
 
-<file path=ppt/slides/slide11.xml><?xml version="1.0" encoding="utf-8"?>
+<file path=ppt/slides/slide12.xml><?xml version="1.0" encoding="utf-8"?>
 <p:sld xmlns:a="http://schemas.openxmlformats.org/drawingml/2006/main" xmlns:r="http://schemas.openxmlformats.org/officeDocument/2006/relationships" xmlns:p="http://schemas.openxmlformats.org/presentationml/2006/main">
   <p:cSld>
     <p:bg>
@@ -11145,7 +12073,7 @@
 </p:sld>
 </file>
 
-<file path=ppt/slides/slide12.xml><?xml version="1.0" encoding="utf-8"?>
+<file path=ppt/slides/slide13.xml><?xml version="1.0" encoding="utf-8"?>
 <p:sld xmlns:a="http://schemas.openxmlformats.org/drawingml/2006/main" xmlns:r="http://schemas.openxmlformats.org/officeDocument/2006/relationships" xmlns:p="http://schemas.openxmlformats.org/presentationml/2006/main">
   <p:cSld>
     <p:bg>
@@ -11901,7 +12829,27 @@
                   </a:schemeClr>
                 </a:solidFill>
               </a:rPr>
-              <a:t> achieves near-identical performance with ~22% less training time </a:t>
+              <a:t> achieves near-identical performance with </a:t>
+            </a:r>
+            <a:r>
+              <a:rPr lang="en-US" sz="2400" b="1" dirty="0">
+                <a:solidFill>
+                  <a:schemeClr val="tx1">
+                    <a:alpha val="80000"/>
+                  </a:schemeClr>
+                </a:solidFill>
+              </a:rPr>
+              <a:t>~22% less training time</a:t>
+            </a:r>
+            <a:r>
+              <a:rPr lang="en-US" sz="2400" dirty="0">
+                <a:solidFill>
+                  <a:schemeClr val="tx1">
+                    <a:alpha val="80000"/>
+                  </a:schemeClr>
+                </a:solidFill>
+              </a:rPr>
+              <a:t> </a:t>
             </a:r>
           </a:p>
           <a:p>
@@ -11914,7 +12862,17 @@
                   </a:schemeClr>
                 </a:solidFill>
               </a:rPr>
-              <a:t>Prompt tuning is faster but sacrifices accuracy </a:t>
+              <a:t>Prompt tuning is </a:t>
+            </a:r>
+            <a:r>
+              <a:rPr lang="en-US" sz="2400" b="1" dirty="0">
+                <a:solidFill>
+                  <a:schemeClr val="tx1">
+                    <a:alpha val="80000"/>
+                  </a:schemeClr>
+                </a:solidFill>
+              </a:rPr>
+              <a:t>faster but sacrifices accuracy </a:t>
             </a:r>
           </a:p>
           <a:p>
@@ -12016,7 +12974,7 @@
 </p:sld>
 </file>
 
-<file path=ppt/slides/slide13.xml><?xml version="1.0" encoding="utf-8"?>
+<file path=ppt/slides/slide14.xml><?xml version="1.0" encoding="utf-8"?>
 <p:sld xmlns:a="http://schemas.openxmlformats.org/drawingml/2006/main" xmlns:r="http://schemas.openxmlformats.org/officeDocument/2006/relationships" xmlns:p="http://schemas.openxmlformats.org/presentationml/2006/main">
   <p:cSld>
     <p:bg>
@@ -13067,12 +14025,12 @@
           <a:lstStyle/>
           <a:p>
             <a:r>
-              <a:rPr lang="en-US" sz="6800">
+              <a:rPr lang="en-US" sz="6800" dirty="0">
                 <a:solidFill>
                   <a:srgbClr val="FFFFFF"/>
                 </a:solidFill>
               </a:rPr>
-              <a:t>Problem + Motivation</a:t>
+              <a:t>Problem</a:t>
             </a:r>
           </a:p>
         </p:txBody>
@@ -13609,8 +14567,43 @@
                   </a:schemeClr>
                 </a:solidFill>
               </a:rPr>
-              <a:t>Given a tweet -&gt; Predict sentiment (Positive or Negative)</a:t>
+              <a:t>Sentiment Analysis:</a:t>
             </a:r>
+          </a:p>
+          <a:p>
+            <a:pPr lvl="1"/>
+            <a:r>
+              <a:rPr lang="en-US" sz="2000" b="1" dirty="0">
+                <a:solidFill>
+                  <a:schemeClr val="tx1">
+                    <a:alpha val="80000"/>
+                  </a:schemeClr>
+                </a:solidFill>
+                <a:highlight>
+                  <a:srgbClr val="00FFFF"/>
+                </a:highlight>
+              </a:rPr>
+              <a:t>Given a text -&gt; Predict sentiment</a:t>
+            </a:r>
+            <a:endParaRPr lang="en-US" sz="2400" b="1" dirty="0">
+              <a:solidFill>
+                <a:schemeClr val="tx1">
+                  <a:alpha val="80000"/>
+                </a:schemeClr>
+              </a:solidFill>
+              <a:highlight>
+                <a:srgbClr val="00FFFF"/>
+              </a:highlight>
+            </a:endParaRPr>
+          </a:p>
+          <a:p>
+            <a:endParaRPr lang="en-US" sz="2400" dirty="0">
+              <a:solidFill>
+                <a:schemeClr val="tx1">
+                  <a:alpha val="80000"/>
+                </a:schemeClr>
+              </a:solidFill>
+            </a:endParaRPr>
           </a:p>
           <a:p>
             <a:r>
@@ -13621,82 +14614,96 @@
                   </a:schemeClr>
                 </a:solidFill>
               </a:rPr>
-              <a:t>Compare different fine-tuning methods</a:t>
+              <a:t>Examples: </a:t>
             </a:r>
           </a:p>
           <a:p>
             <a:pPr lvl="1"/>
             <a:r>
-              <a:rPr lang="en-US" dirty="0">
+              <a:rPr lang="en-US" sz="2000" dirty="0">
                 <a:solidFill>
                   <a:schemeClr val="tx1">
                     <a:alpha val="80000"/>
                   </a:schemeClr>
                 </a:solidFill>
               </a:rPr>
-              <a:t>Full-tune – Upper Bound</a:t>
+              <a:t>This movie was very good!</a:t>
             </a:r>
           </a:p>
           <a:p>
-            <a:pPr lvl="1"/>
+            <a:pPr lvl="2"/>
             <a:r>
-              <a:rPr lang="en-US" dirty="0" err="1">
+              <a:rPr lang="en-US" sz="1600" dirty="0">
                 <a:solidFill>
                   <a:schemeClr val="tx1">
                     <a:alpha val="80000"/>
                   </a:schemeClr>
                 </a:solidFill>
               </a:rPr>
-              <a:t>LoRA</a:t>
+              <a:t>Predict: </a:t>
             </a:r>
             <a:r>
-              <a:rPr lang="en-US" dirty="0">
+              <a:rPr lang="en-US" sz="1600" dirty="0">
+                <a:solidFill>
+                  <a:schemeClr val="tx1">
+                    <a:alpha val="80000"/>
+                  </a:schemeClr>
+                </a:solidFill>
+                <a:highlight>
+                  <a:srgbClr val="00FF00"/>
+                </a:highlight>
+              </a:rPr>
+              <a:t>Positive</a:t>
+            </a:r>
+          </a:p>
+          <a:p>
+            <a:pPr lvl="1"/>
+            <a:r>
+              <a:rPr lang="en-US" sz="2000" dirty="0">
                 <a:solidFill>
                   <a:schemeClr val="tx1">
                     <a:alpha val="80000"/>
                   </a:schemeClr>
                 </a:solidFill>
               </a:rPr>
-              <a:t> (Low rank adaptation)</a:t>
+              <a:t>This movie was horrible.</a:t>
             </a:r>
           </a:p>
           <a:p>
-            <a:pPr lvl="1"/>
+            <a:pPr lvl="2"/>
             <a:r>
-              <a:rPr lang="en-US" dirty="0">
+              <a:rPr lang="en-US" sz="1200" dirty="0">
                 <a:solidFill>
                   <a:schemeClr val="tx1">
                     <a:alpha val="80000"/>
                   </a:schemeClr>
                 </a:solidFill>
               </a:rPr>
-              <a:t>Prompt Tuning</a:t>
+              <a:t>Predict: </a:t>
             </a:r>
-          </a:p>
-          <a:p>
-            <a:pPr lvl="1"/>
             <a:r>
-              <a:rPr lang="en-US" dirty="0">
+              <a:rPr lang="en-US" sz="1200" dirty="0">
                 <a:solidFill>
                   <a:schemeClr val="tx1">
                     <a:alpha val="80000"/>
                   </a:schemeClr>
                 </a:solidFill>
+                <a:highlight>
+                  <a:srgbClr val="FF0000"/>
+                </a:highlight>
               </a:rPr>
-              <a:t>Classifier Head Only – Lower Bound</a:t>
+              <a:t>Negative</a:t>
             </a:r>
           </a:p>
           <a:p>
-            <a:r>
-              <a:rPr lang="en-US" sz="2400" dirty="0">
-                <a:solidFill>
-                  <a:schemeClr val="tx1">
-                    <a:alpha val="80000"/>
-                  </a:schemeClr>
-                </a:solidFill>
-              </a:rPr>
-              <a:t>Strengths, Weakness, Trade-offs</a:t>
-            </a:r>
+            <a:pPr lvl="1"/>
+            <a:endParaRPr lang="en-US" sz="2000" dirty="0">
+              <a:solidFill>
+                <a:schemeClr val="tx1">
+                  <a:alpha val="80000"/>
+                </a:schemeClr>
+              </a:solidFill>
+            </a:endParaRPr>
           </a:p>
         </p:txBody>
       </p:sp>
@@ -13776,6 +14783,913 @@
 </file>
 
 <file path=ppt/slides/slide3.xml><?xml version="1.0" encoding="utf-8"?>
+<p:sld xmlns:a="http://schemas.openxmlformats.org/drawingml/2006/main" xmlns:r="http://schemas.openxmlformats.org/officeDocument/2006/relationships" xmlns:p="http://schemas.openxmlformats.org/presentationml/2006/main">
+  <p:cSld>
+    <p:bg>
+      <p:bgPr>
+        <a:solidFill>
+          <a:schemeClr val="bg1"/>
+        </a:solidFill>
+        <a:effectLst/>
+      </p:bgPr>
+    </p:bg>
+    <p:spTree>
+      <p:nvGrpSpPr>
+        <p:cNvPr id="1" name=""/>
+        <p:cNvGrpSpPr/>
+        <p:nvPr/>
+      </p:nvGrpSpPr>
+      <p:grpSpPr>
+        <a:xfrm>
+          <a:off x="0" y="0"/>
+          <a:ext cx="0" cy="0"/>
+          <a:chOff x="0" y="0"/>
+          <a:chExt cx="0" cy="0"/>
+        </a:xfrm>
+      </p:grpSpPr>
+      <p:sp useBgFill="1">
+        <p:nvSpPr>
+          <p:cNvPr id="8" name="Rectangle 7">
+            <a:extLst>
+              <a:ext uri="{FF2B5EF4-FFF2-40B4-BE49-F238E27FC236}">
+                <a16:creationId xmlns:a16="http://schemas.microsoft.com/office/drawing/2014/main" id="{A2679492-7988-4050-9056-542444452411}"/>
+              </a:ext>
+              <a:ext uri="{C183D7F6-B498-43B3-948B-1728B52AA6E4}">
+                <adec:decorative xmlns:adec="http://schemas.microsoft.com/office/drawing/2017/decorative" val="1"/>
+              </a:ext>
+            </a:extLst>
+          </p:cNvPr>
+          <p:cNvSpPr>
+            <a:spLocks noGrp="1" noRot="1" noChangeAspect="1" noMove="1" noResize="1" noEditPoints="1" noAdjustHandles="1" noChangeArrowheads="1" noChangeShapeType="1" noTextEdit="1"/>
+          </p:cNvSpPr>
+          <p:nvPr>
+            <p:extLst>
+              <p:ext uri="{386F3935-93C4-4BCD-93E2-E3B085C9AB24}">
+                <p16:designElem xmlns:p16="http://schemas.microsoft.com/office/powerpoint/2015/main" val="1"/>
+              </p:ext>
+            </p:extLst>
+          </p:nvPr>
+        </p:nvSpPr>
+        <p:spPr>
+          <a:xfrm>
+            <a:off x="0" y="0"/>
+            <a:ext cx="12192000" cy="6858000"/>
+          </a:xfrm>
+          <a:prstGeom prst="rect">
+            <a:avLst/>
+          </a:prstGeom>
+          <a:ln>
+            <a:noFill/>
+          </a:ln>
+        </p:spPr>
+        <p:style>
+          <a:lnRef idx="2">
+            <a:schemeClr val="accent1">
+              <a:shade val="50000"/>
+            </a:schemeClr>
+          </a:lnRef>
+          <a:fillRef idx="1">
+            <a:schemeClr val="accent1"/>
+          </a:fillRef>
+          <a:effectRef idx="0">
+            <a:schemeClr val="accent1"/>
+          </a:effectRef>
+          <a:fontRef idx="minor">
+            <a:schemeClr val="lt1"/>
+          </a:fontRef>
+        </p:style>
+        <p:txBody>
+          <a:bodyPr rtlCol="0" anchor="ctr"/>
+          <a:lstStyle/>
+          <a:p>
+            <a:pPr algn="ctr"/>
+            <a:endParaRPr lang="en-US"/>
+          </a:p>
+        </p:txBody>
+      </p:sp>
+      <p:sp>
+        <p:nvSpPr>
+          <p:cNvPr id="10" name="Rectangle 9">
+            <a:extLst>
+              <a:ext uri="{FF2B5EF4-FFF2-40B4-BE49-F238E27FC236}">
+                <a16:creationId xmlns:a16="http://schemas.microsoft.com/office/drawing/2014/main" id="{B091B163-7D61-4891-ABCF-5C13D9C418D0}"/>
+              </a:ext>
+              <a:ext uri="{C183D7F6-B498-43B3-948B-1728B52AA6E4}">
+                <adec:decorative xmlns:adec="http://schemas.microsoft.com/office/drawing/2017/decorative" val="1"/>
+              </a:ext>
+            </a:extLst>
+          </p:cNvPr>
+          <p:cNvSpPr>
+            <a:spLocks noGrp="1" noRot="1" noChangeAspect="1" noMove="1" noResize="1" noEditPoints="1" noAdjustHandles="1" noChangeArrowheads="1" noChangeShapeType="1" noTextEdit="1"/>
+          </p:cNvSpPr>
+          <p:nvPr>
+            <p:extLst>
+              <p:ext uri="{386F3935-93C4-4BCD-93E2-E3B085C9AB24}">
+                <p16:designElem xmlns:p16="http://schemas.microsoft.com/office/powerpoint/2015/main" val="1"/>
+              </p:ext>
+            </p:extLst>
+          </p:nvPr>
+        </p:nvSpPr>
+        <p:spPr>
+          <a:xfrm>
+            <a:off x="0" y="0"/>
+            <a:ext cx="5779911" cy="6858000"/>
+          </a:xfrm>
+          <a:prstGeom prst="rect">
+            <a:avLst/>
+          </a:prstGeom>
+          <a:gradFill flip="none" rotWithShape="1">
+            <a:gsLst>
+              <a:gs pos="0">
+                <a:schemeClr val="accent1"/>
+              </a:gs>
+              <a:gs pos="100000">
+                <a:schemeClr val="accent2"/>
+              </a:gs>
+            </a:gsLst>
+            <a:lin ang="2700000" scaled="1"/>
+            <a:tileRect/>
+          </a:gradFill>
+          <a:ln>
+            <a:noFill/>
+          </a:ln>
+        </p:spPr>
+        <p:style>
+          <a:lnRef idx="2">
+            <a:schemeClr val="accent1">
+              <a:shade val="50000"/>
+            </a:schemeClr>
+          </a:lnRef>
+          <a:fillRef idx="1">
+            <a:schemeClr val="accent1"/>
+          </a:fillRef>
+          <a:effectRef idx="0">
+            <a:schemeClr val="accent1"/>
+          </a:effectRef>
+          <a:fontRef idx="minor">
+            <a:schemeClr val="lt1"/>
+          </a:fontRef>
+        </p:style>
+        <p:txBody>
+          <a:bodyPr rtlCol="0" anchor="ctr"/>
+          <a:lstStyle/>
+          <a:p>
+            <a:pPr algn="ctr"/>
+            <a:endParaRPr lang="en-US">
+              <a:solidFill>
+                <a:schemeClr val="tx1"/>
+              </a:solidFill>
+            </a:endParaRPr>
+          </a:p>
+        </p:txBody>
+      </p:sp>
+      <p:sp>
+        <p:nvSpPr>
+          <p:cNvPr id="2" name="Title 1">
+            <a:extLst>
+              <a:ext uri="{FF2B5EF4-FFF2-40B4-BE49-F238E27FC236}">
+                <a16:creationId xmlns:a16="http://schemas.microsoft.com/office/drawing/2014/main" id="{4B890354-05BA-BDCC-A53D-30910FAC8033}"/>
+              </a:ext>
+            </a:extLst>
+          </p:cNvPr>
+          <p:cNvSpPr>
+            <a:spLocks noGrp="1"/>
+          </p:cNvSpPr>
+          <p:nvPr>
+            <p:ph type="title"/>
+          </p:nvPr>
+        </p:nvSpPr>
+        <p:spPr>
+          <a:xfrm>
+            <a:off x="1188069" y="381935"/>
+            <a:ext cx="4008583" cy="5974414"/>
+          </a:xfrm>
+        </p:spPr>
+        <p:txBody>
+          <a:bodyPr anchor="ctr">
+            <a:normAutofit/>
+          </a:bodyPr>
+          <a:lstStyle/>
+          <a:p>
+            <a:r>
+              <a:rPr lang="en-US" sz="7400">
+                <a:solidFill>
+                  <a:srgbClr val="FFFFFF"/>
+                </a:solidFill>
+              </a:rPr>
+              <a:t>Objective</a:t>
+            </a:r>
+          </a:p>
+        </p:txBody>
+      </p:sp>
+      <p:grpSp>
+        <p:nvGrpSpPr>
+          <p:cNvPr id="12" name="Group 11">
+            <a:extLst>
+              <a:ext uri="{FF2B5EF4-FFF2-40B4-BE49-F238E27FC236}">
+                <a16:creationId xmlns:a16="http://schemas.microsoft.com/office/drawing/2014/main" id="{0474DF76-993E-44DE-AFB0-C416182ACECF}"/>
+              </a:ext>
+              <a:ext uri="{C183D7F6-B498-43B3-948B-1728B52AA6E4}">
+                <adec:decorative xmlns:adec="http://schemas.microsoft.com/office/drawing/2017/decorative" val="1"/>
+              </a:ext>
+            </a:extLst>
+          </p:cNvPr>
+          <p:cNvGrpSpPr>
+            <a:grpSpLocks noGrp="1" noUngrp="1" noRot="1" noChangeAspect="1" noMove="1" noResize="1"/>
+          </p:cNvGrpSpPr>
+          <p:nvPr>
+            <p:extLst>
+              <p:ext uri="{386F3935-93C4-4BCD-93E2-E3B085C9AB24}">
+                <p16:designElem xmlns:p16="http://schemas.microsoft.com/office/powerpoint/2015/main" val="1"/>
+              </p:ext>
+            </p:extLst>
+          </p:nvPr>
+        </p:nvGrpSpPr>
+        <p:grpSpPr>
+          <a:xfrm>
+            <a:off x="613892" y="554152"/>
+            <a:ext cx="574177" cy="1075866"/>
+            <a:chOff x="613892" y="554152"/>
+            <a:chExt cx="574177" cy="1075866"/>
+          </a:xfrm>
+          <a:solidFill>
+            <a:srgbClr val="FFFFFF"/>
+          </a:solidFill>
+        </p:grpSpPr>
+        <p:sp>
+          <p:nvSpPr>
+            <p:cNvPr id="13" name="Graphic 11">
+              <a:extLst>
+                <a:ext uri="{FF2B5EF4-FFF2-40B4-BE49-F238E27FC236}">
+                  <a16:creationId xmlns:a16="http://schemas.microsoft.com/office/drawing/2014/main" id="{6CB927A4-E432-4310-9CD5-E89FF5063179}"/>
+                </a:ext>
+                <a:ext uri="{C183D7F6-B498-43B3-948B-1728B52AA6E4}">
+                  <adec:decorative xmlns:adec="http://schemas.microsoft.com/office/drawing/2017/decorative" val="1"/>
+                </a:ext>
+              </a:extLst>
+            </p:cNvPr>
+            <p:cNvSpPr/>
+            <p:nvPr>
+              <p:extLst>
+                <p:ext uri="{386F3935-93C4-4BCD-93E2-E3B085C9AB24}">
+                  <p16:designElem xmlns:p16="http://schemas.microsoft.com/office/powerpoint/2015/main" val="1"/>
+                </p:ext>
+              </p:extLst>
+            </p:nvPr>
+          </p:nvSpPr>
+          <p:spPr>
+            <a:xfrm>
+              <a:off x="633061" y="554152"/>
+              <a:ext cx="171515" cy="171515"/>
+            </a:xfrm>
+            <a:custGeom>
+              <a:avLst/>
+              <a:gdLst>
+                <a:gd name="connsiteX0" fmla="*/ 159874 w 171515"/>
+                <a:gd name="connsiteY0" fmla="*/ 74116 h 171515"/>
+                <a:gd name="connsiteX1" fmla="*/ 97399 w 171515"/>
+                <a:gd name="connsiteY1" fmla="*/ 74116 h 171515"/>
+                <a:gd name="connsiteX2" fmla="*/ 97399 w 171515"/>
+                <a:gd name="connsiteY2" fmla="*/ 11641 h 171515"/>
+                <a:gd name="connsiteX3" fmla="*/ 85758 w 171515"/>
+                <a:gd name="connsiteY3" fmla="*/ 0 h 171515"/>
+                <a:gd name="connsiteX4" fmla="*/ 74116 w 171515"/>
+                <a:gd name="connsiteY4" fmla="*/ 11641 h 171515"/>
+                <a:gd name="connsiteX5" fmla="*/ 74116 w 171515"/>
+                <a:gd name="connsiteY5" fmla="*/ 74116 h 171515"/>
+                <a:gd name="connsiteX6" fmla="*/ 11641 w 171515"/>
+                <a:gd name="connsiteY6" fmla="*/ 74116 h 171515"/>
+                <a:gd name="connsiteX7" fmla="*/ 0 w 171515"/>
+                <a:gd name="connsiteY7" fmla="*/ 85758 h 171515"/>
+                <a:gd name="connsiteX8" fmla="*/ 11641 w 171515"/>
+                <a:gd name="connsiteY8" fmla="*/ 97399 h 171515"/>
+                <a:gd name="connsiteX9" fmla="*/ 74116 w 171515"/>
+                <a:gd name="connsiteY9" fmla="*/ 97399 h 171515"/>
+                <a:gd name="connsiteX10" fmla="*/ 74116 w 171515"/>
+                <a:gd name="connsiteY10" fmla="*/ 159874 h 171515"/>
+                <a:gd name="connsiteX11" fmla="*/ 85758 w 171515"/>
+                <a:gd name="connsiteY11" fmla="*/ 171515 h 171515"/>
+                <a:gd name="connsiteX12" fmla="*/ 97399 w 171515"/>
+                <a:gd name="connsiteY12" fmla="*/ 159874 h 171515"/>
+                <a:gd name="connsiteX13" fmla="*/ 97399 w 171515"/>
+                <a:gd name="connsiteY13" fmla="*/ 97399 h 171515"/>
+                <a:gd name="connsiteX14" fmla="*/ 159874 w 171515"/>
+                <a:gd name="connsiteY14" fmla="*/ 97399 h 171515"/>
+                <a:gd name="connsiteX15" fmla="*/ 171515 w 171515"/>
+                <a:gd name="connsiteY15" fmla="*/ 85758 h 171515"/>
+                <a:gd name="connsiteX16" fmla="*/ 159874 w 171515"/>
+                <a:gd name="connsiteY16" fmla="*/ 74116 h 171515"/>
+              </a:gdLst>
+              <a:ahLst/>
+              <a:cxnLst>
+                <a:cxn ang="0">
+                  <a:pos x="connsiteX0" y="connsiteY0"/>
+                </a:cxn>
+                <a:cxn ang="0">
+                  <a:pos x="connsiteX1" y="connsiteY1"/>
+                </a:cxn>
+                <a:cxn ang="0">
+                  <a:pos x="connsiteX2" y="connsiteY2"/>
+                </a:cxn>
+                <a:cxn ang="0">
+                  <a:pos x="connsiteX3" y="connsiteY3"/>
+                </a:cxn>
+                <a:cxn ang="0">
+                  <a:pos x="connsiteX4" y="connsiteY4"/>
+                </a:cxn>
+                <a:cxn ang="0">
+                  <a:pos x="connsiteX5" y="connsiteY5"/>
+                </a:cxn>
+                <a:cxn ang="0">
+                  <a:pos x="connsiteX6" y="connsiteY6"/>
+                </a:cxn>
+                <a:cxn ang="0">
+                  <a:pos x="connsiteX7" y="connsiteY7"/>
+                </a:cxn>
+                <a:cxn ang="0">
+                  <a:pos x="connsiteX8" y="connsiteY8"/>
+                </a:cxn>
+                <a:cxn ang="0">
+                  <a:pos x="connsiteX9" y="connsiteY9"/>
+                </a:cxn>
+                <a:cxn ang="0">
+                  <a:pos x="connsiteX10" y="connsiteY10"/>
+                </a:cxn>
+                <a:cxn ang="0">
+                  <a:pos x="connsiteX11" y="connsiteY11"/>
+                </a:cxn>
+                <a:cxn ang="0">
+                  <a:pos x="connsiteX12" y="connsiteY12"/>
+                </a:cxn>
+                <a:cxn ang="0">
+                  <a:pos x="connsiteX13" y="connsiteY13"/>
+                </a:cxn>
+                <a:cxn ang="0">
+                  <a:pos x="connsiteX14" y="connsiteY14"/>
+                </a:cxn>
+                <a:cxn ang="0">
+                  <a:pos x="connsiteX15" y="connsiteY15"/>
+                </a:cxn>
+                <a:cxn ang="0">
+                  <a:pos x="connsiteX16" y="connsiteY16"/>
+                </a:cxn>
+              </a:cxnLst>
+              <a:rect l="l" t="t" r="r" b="b"/>
+              <a:pathLst>
+                <a:path w="171515" h="171515">
+                  <a:moveTo>
+                    <a:pt x="159874" y="74116"/>
+                  </a:moveTo>
+                  <a:lnTo>
+                    <a:pt x="97399" y="74116"/>
+                  </a:lnTo>
+                  <a:lnTo>
+                    <a:pt x="97399" y="11641"/>
+                  </a:lnTo>
+                  <a:cubicBezTo>
+                    <a:pt x="97399" y="5212"/>
+                    <a:pt x="92187" y="0"/>
+                    <a:pt x="85758" y="0"/>
+                  </a:cubicBezTo>
+                  <a:cubicBezTo>
+                    <a:pt x="79328" y="0"/>
+                    <a:pt x="74116" y="5212"/>
+                    <a:pt x="74116" y="11641"/>
+                  </a:cubicBezTo>
+                  <a:lnTo>
+                    <a:pt x="74116" y="74116"/>
+                  </a:lnTo>
+                  <a:lnTo>
+                    <a:pt x="11641" y="74116"/>
+                  </a:lnTo>
+                  <a:cubicBezTo>
+                    <a:pt x="5212" y="74116"/>
+                    <a:pt x="0" y="79328"/>
+                    <a:pt x="0" y="85758"/>
+                  </a:cubicBezTo>
+                  <a:cubicBezTo>
+                    <a:pt x="0" y="92187"/>
+                    <a:pt x="5212" y="97399"/>
+                    <a:pt x="11641" y="97399"/>
+                  </a:cubicBezTo>
+                  <a:lnTo>
+                    <a:pt x="74116" y="97399"/>
+                  </a:lnTo>
+                  <a:lnTo>
+                    <a:pt x="74116" y="159874"/>
+                  </a:lnTo>
+                  <a:cubicBezTo>
+                    <a:pt x="74116" y="166303"/>
+                    <a:pt x="79328" y="171515"/>
+                    <a:pt x="85758" y="171515"/>
+                  </a:cubicBezTo>
+                  <a:cubicBezTo>
+                    <a:pt x="92187" y="171515"/>
+                    <a:pt x="97399" y="166303"/>
+                    <a:pt x="97399" y="159874"/>
+                  </a:cubicBezTo>
+                  <a:lnTo>
+                    <a:pt x="97399" y="97399"/>
+                  </a:lnTo>
+                  <a:lnTo>
+                    <a:pt x="159874" y="97399"/>
+                  </a:lnTo>
+                  <a:cubicBezTo>
+                    <a:pt x="166303" y="97399"/>
+                    <a:pt x="171515" y="92187"/>
+                    <a:pt x="171515" y="85758"/>
+                  </a:cubicBezTo>
+                  <a:cubicBezTo>
+                    <a:pt x="171515" y="79328"/>
+                    <a:pt x="166303" y="74116"/>
+                    <a:pt x="159874" y="74116"/>
+                  </a:cubicBezTo>
+                  <a:close/>
+                </a:path>
+              </a:pathLst>
+            </a:custGeom>
+            <a:grpFill/>
+            <a:ln w="776" cap="flat">
+              <a:noFill/>
+              <a:prstDash val="solid"/>
+              <a:miter/>
+            </a:ln>
+          </p:spPr>
+          <p:txBody>
+            <a:bodyPr rtlCol="0" anchor="ctr"/>
+            <a:lstStyle/>
+            <a:p>
+              <a:endParaRPr lang="en-US"/>
+            </a:p>
+          </p:txBody>
+        </p:sp>
+        <p:sp>
+          <p:nvSpPr>
+            <p:cNvPr id="14" name="Graphic 10">
+              <a:extLst>
+                <a:ext uri="{FF2B5EF4-FFF2-40B4-BE49-F238E27FC236}">
+                  <a16:creationId xmlns:a16="http://schemas.microsoft.com/office/drawing/2014/main" id="{E3020543-B24B-4EC4-8FFC-8DD88EEA91A8}"/>
+                </a:ext>
+                <a:ext uri="{C183D7F6-B498-43B3-948B-1728B52AA6E4}">
+                  <adec:decorative xmlns:adec="http://schemas.microsoft.com/office/drawing/2017/decorative" val="1"/>
+                </a:ext>
+              </a:extLst>
+            </p:cNvPr>
+            <p:cNvSpPr/>
+            <p:nvPr>
+              <p:extLst>
+                <p:ext uri="{386F3935-93C4-4BCD-93E2-E3B085C9AB24}">
+                  <p16:designElem xmlns:p16="http://schemas.microsoft.com/office/powerpoint/2015/main" val="1"/>
+                </p:ext>
+              </p:extLst>
+            </p:nvPr>
+          </p:nvSpPr>
+          <p:spPr>
+            <a:xfrm>
+              <a:off x="1075643" y="837005"/>
+              <a:ext cx="112426" cy="112426"/>
+            </a:xfrm>
+            <a:custGeom>
+              <a:avLst/>
+              <a:gdLst>
+                <a:gd name="connsiteX0" fmla="*/ 112426 w 112426"/>
+                <a:gd name="connsiteY0" fmla="*/ 56213 h 112426"/>
+                <a:gd name="connsiteX1" fmla="*/ 56213 w 112426"/>
+                <a:gd name="connsiteY1" fmla="*/ 112426 h 112426"/>
+                <a:gd name="connsiteX2" fmla="*/ 0 w 112426"/>
+                <a:gd name="connsiteY2" fmla="*/ 56213 h 112426"/>
+                <a:gd name="connsiteX3" fmla="*/ 56213 w 112426"/>
+                <a:gd name="connsiteY3" fmla="*/ 0 h 112426"/>
+                <a:gd name="connsiteX4" fmla="*/ 112426 w 112426"/>
+                <a:gd name="connsiteY4" fmla="*/ 56213 h 112426"/>
+              </a:gdLst>
+              <a:ahLst/>
+              <a:cxnLst>
+                <a:cxn ang="0">
+                  <a:pos x="connsiteX0" y="connsiteY0"/>
+                </a:cxn>
+                <a:cxn ang="0">
+                  <a:pos x="connsiteX1" y="connsiteY1"/>
+                </a:cxn>
+                <a:cxn ang="0">
+                  <a:pos x="connsiteX2" y="connsiteY2"/>
+                </a:cxn>
+                <a:cxn ang="0">
+                  <a:pos x="connsiteX3" y="connsiteY3"/>
+                </a:cxn>
+                <a:cxn ang="0">
+                  <a:pos x="connsiteX4" y="connsiteY4"/>
+                </a:cxn>
+              </a:cxnLst>
+              <a:rect l="l" t="t" r="r" b="b"/>
+              <a:pathLst>
+                <a:path w="112426" h="112426">
+                  <a:moveTo>
+                    <a:pt x="112426" y="56213"/>
+                  </a:moveTo>
+                  <a:cubicBezTo>
+                    <a:pt x="112426" y="87259"/>
+                    <a:pt x="87259" y="112426"/>
+                    <a:pt x="56213" y="112426"/>
+                  </a:cubicBezTo>
+                  <a:cubicBezTo>
+                    <a:pt x="25167" y="112426"/>
+                    <a:pt x="0" y="87259"/>
+                    <a:pt x="0" y="56213"/>
+                  </a:cubicBezTo>
+                  <a:cubicBezTo>
+                    <a:pt x="0" y="25167"/>
+                    <a:pt x="25167" y="0"/>
+                    <a:pt x="56213" y="0"/>
+                  </a:cubicBezTo>
+                  <a:cubicBezTo>
+                    <a:pt x="87259" y="0"/>
+                    <a:pt x="112426" y="25167"/>
+                    <a:pt x="112426" y="56213"/>
+                  </a:cubicBezTo>
+                  <a:close/>
+                </a:path>
+              </a:pathLst>
+            </a:custGeom>
+            <a:grpFill/>
+            <a:ln w="516" cap="flat">
+              <a:noFill/>
+              <a:prstDash val="solid"/>
+              <a:miter/>
+            </a:ln>
+          </p:spPr>
+          <p:txBody>
+            <a:bodyPr rtlCol="0" anchor="ctr"/>
+            <a:lstStyle/>
+            <a:p>
+              <a:endParaRPr lang="en-US"/>
+            </a:p>
+          </p:txBody>
+        </p:sp>
+        <p:sp>
+          <p:nvSpPr>
+            <p:cNvPr id="15" name="Graphic 12">
+              <a:extLst>
+                <a:ext uri="{FF2B5EF4-FFF2-40B4-BE49-F238E27FC236}">
+                  <a16:creationId xmlns:a16="http://schemas.microsoft.com/office/drawing/2014/main" id="{1453BF6C-B012-48B7-B4E8-6D7AC7C27D02}"/>
+                </a:ext>
+                <a:ext uri="{C183D7F6-B498-43B3-948B-1728B52AA6E4}">
+                  <adec:decorative xmlns:adec="http://schemas.microsoft.com/office/drawing/2017/decorative" val="1"/>
+                </a:ext>
+              </a:extLst>
+            </p:cNvPr>
+            <p:cNvSpPr/>
+            <p:nvPr>
+              <p:extLst>
+                <p:ext uri="{386F3935-93C4-4BCD-93E2-E3B085C9AB24}">
+                  <p16:designElem xmlns:p16="http://schemas.microsoft.com/office/powerpoint/2015/main" val="1"/>
+                </p:ext>
+              </p:extLst>
+            </p:nvPr>
+          </p:nvSpPr>
+          <p:spPr>
+            <a:xfrm>
+              <a:off x="613892" y="1472473"/>
+              <a:ext cx="157545" cy="157545"/>
+            </a:xfrm>
+            <a:custGeom>
+              <a:avLst/>
+              <a:gdLst>
+                <a:gd name="connsiteX0" fmla="*/ 78773 w 157545"/>
+                <a:gd name="connsiteY0" fmla="*/ 23283 h 157545"/>
+                <a:gd name="connsiteX1" fmla="*/ 134262 w 157545"/>
+                <a:gd name="connsiteY1" fmla="*/ 78773 h 157545"/>
+                <a:gd name="connsiteX2" fmla="*/ 78773 w 157545"/>
+                <a:gd name="connsiteY2" fmla="*/ 134262 h 157545"/>
+                <a:gd name="connsiteX3" fmla="*/ 23283 w 157545"/>
+                <a:gd name="connsiteY3" fmla="*/ 78773 h 157545"/>
+                <a:gd name="connsiteX4" fmla="*/ 78773 w 157545"/>
+                <a:gd name="connsiteY4" fmla="*/ 23283 h 157545"/>
+                <a:gd name="connsiteX5" fmla="*/ 78773 w 157545"/>
+                <a:gd name="connsiteY5" fmla="*/ 0 h 157545"/>
+                <a:gd name="connsiteX6" fmla="*/ 0 w 157545"/>
+                <a:gd name="connsiteY6" fmla="*/ 78773 h 157545"/>
+                <a:gd name="connsiteX7" fmla="*/ 78773 w 157545"/>
+                <a:gd name="connsiteY7" fmla="*/ 157545 h 157545"/>
+                <a:gd name="connsiteX8" fmla="*/ 157545 w 157545"/>
+                <a:gd name="connsiteY8" fmla="*/ 78773 h 157545"/>
+                <a:gd name="connsiteX9" fmla="*/ 78773 w 157545"/>
+                <a:gd name="connsiteY9" fmla="*/ 0 h 157545"/>
+              </a:gdLst>
+              <a:ahLst/>
+              <a:cxnLst>
+                <a:cxn ang="0">
+                  <a:pos x="connsiteX0" y="connsiteY0"/>
+                </a:cxn>
+                <a:cxn ang="0">
+                  <a:pos x="connsiteX1" y="connsiteY1"/>
+                </a:cxn>
+                <a:cxn ang="0">
+                  <a:pos x="connsiteX2" y="connsiteY2"/>
+                </a:cxn>
+                <a:cxn ang="0">
+                  <a:pos x="connsiteX3" y="connsiteY3"/>
+                </a:cxn>
+                <a:cxn ang="0">
+                  <a:pos x="connsiteX4" y="connsiteY4"/>
+                </a:cxn>
+                <a:cxn ang="0">
+                  <a:pos x="connsiteX5" y="connsiteY5"/>
+                </a:cxn>
+                <a:cxn ang="0">
+                  <a:pos x="connsiteX6" y="connsiteY6"/>
+                </a:cxn>
+                <a:cxn ang="0">
+                  <a:pos x="connsiteX7" y="connsiteY7"/>
+                </a:cxn>
+                <a:cxn ang="0">
+                  <a:pos x="connsiteX8" y="connsiteY8"/>
+                </a:cxn>
+                <a:cxn ang="0">
+                  <a:pos x="connsiteX9" y="connsiteY9"/>
+                </a:cxn>
+              </a:cxnLst>
+              <a:rect l="l" t="t" r="r" b="b"/>
+              <a:pathLst>
+                <a:path w="157545" h="157545">
+                  <a:moveTo>
+                    <a:pt x="78773" y="23283"/>
+                  </a:moveTo>
+                  <a:cubicBezTo>
+                    <a:pt x="109419" y="23283"/>
+                    <a:pt x="134262" y="48126"/>
+                    <a:pt x="134262" y="78773"/>
+                  </a:cubicBezTo>
+                  <a:cubicBezTo>
+                    <a:pt x="134262" y="109419"/>
+                    <a:pt x="109419" y="134262"/>
+                    <a:pt x="78773" y="134262"/>
+                  </a:cubicBezTo>
+                  <a:cubicBezTo>
+                    <a:pt x="48126" y="134262"/>
+                    <a:pt x="23283" y="109419"/>
+                    <a:pt x="23283" y="78773"/>
+                  </a:cubicBezTo>
+                  <a:cubicBezTo>
+                    <a:pt x="23312" y="48139"/>
+                    <a:pt x="48139" y="23312"/>
+                    <a:pt x="78773" y="23283"/>
+                  </a:cubicBezTo>
+                  <a:moveTo>
+                    <a:pt x="78773" y="0"/>
+                  </a:moveTo>
+                  <a:cubicBezTo>
+                    <a:pt x="35268" y="0"/>
+                    <a:pt x="0" y="35268"/>
+                    <a:pt x="0" y="78773"/>
+                  </a:cubicBezTo>
+                  <a:cubicBezTo>
+                    <a:pt x="0" y="122277"/>
+                    <a:pt x="35268" y="157545"/>
+                    <a:pt x="78773" y="157545"/>
+                  </a:cubicBezTo>
+                  <a:cubicBezTo>
+                    <a:pt x="122277" y="157545"/>
+                    <a:pt x="157545" y="122277"/>
+                    <a:pt x="157545" y="78773"/>
+                  </a:cubicBezTo>
+                  <a:cubicBezTo>
+                    <a:pt x="157545" y="35268"/>
+                    <a:pt x="122277" y="0"/>
+                    <a:pt x="78773" y="0"/>
+                  </a:cubicBezTo>
+                  <a:close/>
+                </a:path>
+              </a:pathLst>
+            </a:custGeom>
+            <a:grpFill/>
+            <a:ln w="751" cap="flat">
+              <a:noFill/>
+              <a:prstDash val="solid"/>
+              <a:miter/>
+            </a:ln>
+          </p:spPr>
+          <p:txBody>
+            <a:bodyPr rtlCol="0" anchor="ctr"/>
+            <a:lstStyle/>
+            <a:p>
+              <a:endParaRPr lang="en-US"/>
+            </a:p>
+          </p:txBody>
+        </p:sp>
+      </p:grpSp>
+      <p:sp>
+        <p:nvSpPr>
+          <p:cNvPr id="3" name="Content Placeholder 2">
+            <a:extLst>
+              <a:ext uri="{FF2B5EF4-FFF2-40B4-BE49-F238E27FC236}">
+                <a16:creationId xmlns:a16="http://schemas.microsoft.com/office/drawing/2014/main" id="{949F9A3F-FB69-67D6-F1C9-188A0DB4488B}"/>
+              </a:ext>
+            </a:extLst>
+          </p:cNvPr>
+          <p:cNvSpPr>
+            <a:spLocks noGrp="1"/>
+          </p:cNvSpPr>
+          <p:nvPr>
+            <p:ph idx="1"/>
+          </p:nvPr>
+        </p:nvSpPr>
+        <p:spPr>
+          <a:xfrm>
+            <a:off x="6297233" y="518400"/>
+            <a:ext cx="4771607" cy="5837949"/>
+          </a:xfrm>
+        </p:spPr>
+        <p:txBody>
+          <a:bodyPr anchor="ctr">
+            <a:normAutofit/>
+          </a:bodyPr>
+          <a:lstStyle/>
+          <a:p>
+            <a:r>
+              <a:rPr lang="en-US" sz="2000" b="1" dirty="0">
+                <a:solidFill>
+                  <a:schemeClr val="tx1">
+                    <a:alpha val="80000"/>
+                  </a:schemeClr>
+                </a:solidFill>
+                <a:highlight>
+                  <a:srgbClr val="FF0000"/>
+                </a:highlight>
+              </a:rPr>
+              <a:t>Compare different fine-tuning methods</a:t>
+            </a:r>
+          </a:p>
+          <a:p>
+            <a:pPr lvl="1"/>
+            <a:r>
+              <a:rPr lang="en-US" sz="2000" dirty="0">
+                <a:solidFill>
+                  <a:schemeClr val="tx1">
+                    <a:alpha val="80000"/>
+                  </a:schemeClr>
+                </a:solidFill>
+              </a:rPr>
+              <a:t>Full-tune – Upper Bound</a:t>
+            </a:r>
+          </a:p>
+          <a:p>
+            <a:pPr lvl="1"/>
+            <a:r>
+              <a:rPr lang="en-US" sz="2000" dirty="0" err="1">
+                <a:solidFill>
+                  <a:schemeClr val="tx1">
+                    <a:alpha val="80000"/>
+                  </a:schemeClr>
+                </a:solidFill>
+                <a:highlight>
+                  <a:srgbClr val="FFFF00"/>
+                </a:highlight>
+              </a:rPr>
+              <a:t>LoRA</a:t>
+            </a:r>
+            <a:r>
+              <a:rPr lang="en-US" sz="2000" dirty="0">
+                <a:solidFill>
+                  <a:schemeClr val="tx1">
+                    <a:alpha val="80000"/>
+                  </a:schemeClr>
+                </a:solidFill>
+                <a:highlight>
+                  <a:srgbClr val="FFFF00"/>
+                </a:highlight>
+              </a:rPr>
+              <a:t> (Low rank adaptation)</a:t>
+            </a:r>
+          </a:p>
+          <a:p>
+            <a:pPr lvl="1"/>
+            <a:r>
+              <a:rPr lang="en-US" sz="2000" dirty="0">
+                <a:solidFill>
+                  <a:schemeClr val="tx1">
+                    <a:alpha val="80000"/>
+                  </a:schemeClr>
+                </a:solidFill>
+                <a:highlight>
+                  <a:srgbClr val="FFFF00"/>
+                </a:highlight>
+              </a:rPr>
+              <a:t>Prompt Tuning</a:t>
+            </a:r>
+          </a:p>
+          <a:p>
+            <a:pPr lvl="1"/>
+            <a:r>
+              <a:rPr lang="en-US" sz="2000" dirty="0">
+                <a:solidFill>
+                  <a:schemeClr val="tx1">
+                    <a:alpha val="80000"/>
+                  </a:schemeClr>
+                </a:solidFill>
+              </a:rPr>
+              <a:t>Classifier Head Only – Lower Bound</a:t>
+            </a:r>
+          </a:p>
+          <a:p>
+            <a:r>
+              <a:rPr lang="en-US" sz="2000" dirty="0">
+                <a:solidFill>
+                  <a:schemeClr val="tx1">
+                    <a:alpha val="80000"/>
+                  </a:schemeClr>
+                </a:solidFill>
+              </a:rPr>
+              <a:t>Strengths, Weakness, Trade-offs</a:t>
+            </a:r>
+          </a:p>
+          <a:p>
+            <a:endParaRPr lang="en-US" sz="2000" dirty="0">
+              <a:solidFill>
+                <a:schemeClr val="tx1">
+                  <a:alpha val="80000"/>
+                </a:schemeClr>
+              </a:solidFill>
+            </a:endParaRPr>
+          </a:p>
+        </p:txBody>
+      </p:sp>
+      <p:cxnSp>
+        <p:nvCxnSpPr>
+          <p:cNvPr id="17" name="Straight Connector 16">
+            <a:extLst>
+              <a:ext uri="{FF2B5EF4-FFF2-40B4-BE49-F238E27FC236}">
+                <a16:creationId xmlns:a16="http://schemas.microsoft.com/office/drawing/2014/main" id="{C49DA8F6-BCC1-4447-B54C-57856834B94B}"/>
+              </a:ext>
+              <a:ext uri="{C183D7F6-B498-43B3-948B-1728B52AA6E4}">
+                <adec:decorative xmlns:adec="http://schemas.microsoft.com/office/drawing/2017/decorative" val="1"/>
+              </a:ext>
+            </a:extLst>
+          </p:cNvPr>
+          <p:cNvCxnSpPr>
+            <a:cxnSpLocks noGrp="1" noRot="1" noChangeAspect="1" noMove="1" noResize="1" noEditPoints="1" noAdjustHandles="1" noChangeArrowheads="1" noChangeShapeType="1"/>
+          </p:cNvCxnSpPr>
+          <p:nvPr>
+            <p:extLst>
+              <p:ext uri="{386F3935-93C4-4BCD-93E2-E3B085C9AB24}">
+                <p16:designElem xmlns:p16="http://schemas.microsoft.com/office/powerpoint/2015/main" val="1"/>
+              </p:ext>
+            </p:extLst>
+          </p:nvPr>
+        </p:nvCxnSpPr>
+        <p:spPr>
+          <a:xfrm>
+            <a:off x="11586162" y="3610394"/>
+            <a:ext cx="0" cy="3238728"/>
+          </a:xfrm>
+          <a:prstGeom prst="line">
+            <a:avLst/>
+          </a:prstGeom>
+          <a:ln w="25400" cap="sq">
+            <a:gradFill flip="none" rotWithShape="1">
+              <a:gsLst>
+                <a:gs pos="0">
+                  <a:schemeClr val="accent1"/>
+                </a:gs>
+                <a:gs pos="100000">
+                  <a:schemeClr val="accent2"/>
+                </a:gs>
+              </a:gsLst>
+              <a:lin ang="5400000" scaled="0"/>
+              <a:tileRect/>
+            </a:gradFill>
+            <a:bevel/>
+          </a:ln>
+        </p:spPr>
+        <p:style>
+          <a:lnRef idx="1">
+            <a:schemeClr val="accent1"/>
+          </a:lnRef>
+          <a:fillRef idx="0">
+            <a:schemeClr val="accent1"/>
+          </a:fillRef>
+          <a:effectRef idx="0">
+            <a:schemeClr val="accent1"/>
+          </a:effectRef>
+          <a:fontRef idx="minor">
+            <a:schemeClr val="tx1"/>
+          </a:fontRef>
+        </p:style>
+      </p:cxnSp>
+    </p:spTree>
+    <p:extLst>
+      <p:ext uri="{BB962C8B-B14F-4D97-AF65-F5344CB8AC3E}">
+        <p14:creationId xmlns:p14="http://schemas.microsoft.com/office/powerpoint/2010/main" val="2211161044"/>
+      </p:ext>
+    </p:extLst>
+  </p:cSld>
+  <p:clrMapOvr>
+    <a:masterClrMapping/>
+  </p:clrMapOvr>
+</p:sld>
+</file>
+
+<file path=ppt/slides/slide4.xml><?xml version="1.0" encoding="utf-8"?>
 <p:sld xmlns:a="http://schemas.openxmlformats.org/drawingml/2006/main" xmlns:r="http://schemas.openxmlformats.org/officeDocument/2006/relationships" xmlns:p="http://schemas.openxmlformats.org/presentationml/2006/main">
   <p:cSld>
     <p:bg>
@@ -14955,7 +16869,7 @@
 </p:sld>
 </file>
 
-<file path=ppt/slides/slide4.xml><?xml version="1.0" encoding="utf-8"?>
+<file path=ppt/slides/slide5.xml><?xml version="1.0" encoding="utf-8"?>
 <p:sld xmlns:a="http://schemas.openxmlformats.org/drawingml/2006/main" xmlns:r="http://schemas.openxmlformats.org/officeDocument/2006/relationships" xmlns:p="http://schemas.openxmlformats.org/presentationml/2006/main">
   <p:cSld>
     <p:bg>
@@ -15918,7 +17832,7 @@
 </p:sld>
 </file>
 
-<file path=ppt/slides/slide5.xml><?xml version="1.0" encoding="utf-8"?>
+<file path=ppt/slides/slide6.xml><?xml version="1.0" encoding="utf-8"?>
 <p:sld xmlns:a="http://schemas.openxmlformats.org/drawingml/2006/main" xmlns:r="http://schemas.openxmlformats.org/officeDocument/2006/relationships" xmlns:p="http://schemas.openxmlformats.org/presentationml/2006/main">
   <p:cSld>
     <p:bg>
@@ -16638,7 +18552,7 @@
         </p:spPr>
         <p:txBody>
           <a:bodyPr anchor="ctr">
-            <a:normAutofit/>
+            <a:normAutofit lnSpcReduction="10000"/>
           </a:bodyPr>
           <a:lstStyle/>
           <a:p>
@@ -16760,6 +18674,36 @@
               </a:rPr>
               <a:t>Training set up</a:t>
             </a:r>
+          </a:p>
+          <a:p>
+            <a:pPr lvl="1"/>
+            <a:r>
+              <a:rPr lang="en-US" sz="2000" dirty="0">
+                <a:solidFill>
+                  <a:schemeClr val="tx1">
+                    <a:alpha val="80000"/>
+                  </a:schemeClr>
+                </a:solidFill>
+              </a:rPr>
+              <a:t>Optimizer: </a:t>
+            </a:r>
+            <a:r>
+              <a:rPr lang="en-US" sz="2000" dirty="0" err="1">
+                <a:solidFill>
+                  <a:schemeClr val="tx1">
+                    <a:alpha val="80000"/>
+                  </a:schemeClr>
+                </a:solidFill>
+              </a:rPr>
+              <a:t>AdamW</a:t>
+            </a:r>
+            <a:endParaRPr lang="en-US" sz="2000" dirty="0">
+              <a:solidFill>
+                <a:schemeClr val="tx1">
+                  <a:alpha val="80000"/>
+                </a:schemeClr>
+              </a:solidFill>
+            </a:endParaRPr>
           </a:p>
           <a:p>
             <a:pPr lvl="1"/>
@@ -16935,7 +18879,7 @@
 </p:sld>
 </file>
 
-<file path=ppt/slides/slide6.xml><?xml version="1.0" encoding="utf-8"?>
+<file path=ppt/slides/slide7.xml><?xml version="1.0" encoding="utf-8"?>
 <p:sld xmlns:a="http://schemas.openxmlformats.org/drawingml/2006/main" xmlns:r="http://schemas.openxmlformats.org/officeDocument/2006/relationships" xmlns:p="http://schemas.openxmlformats.org/presentationml/2006/main">
   <p:cSld>
     <p:bg>
@@ -17310,7 +19254,7 @@
 </p:sld>
 </file>
 
-<file path=ppt/slides/slide7.xml><?xml version="1.0" encoding="utf-8"?>
+<file path=ppt/slides/slide8.xml><?xml version="1.0" encoding="utf-8"?>
 <p:sld xmlns:a="http://schemas.openxmlformats.org/drawingml/2006/main" xmlns:r="http://schemas.openxmlformats.org/officeDocument/2006/relationships" xmlns:p="http://schemas.openxmlformats.org/presentationml/2006/main">
   <p:cSld>
     <p:bg>
@@ -17898,7 +19842,7 @@
 </p:sld>
 </file>
 
-<file path=ppt/slides/slide8.xml><?xml version="1.0" encoding="utf-8"?>
+<file path=ppt/slides/slide9.xml><?xml version="1.0" encoding="utf-8"?>
 <p:sld xmlns:a="http://schemas.openxmlformats.org/drawingml/2006/main" xmlns:r="http://schemas.openxmlformats.org/officeDocument/2006/relationships" xmlns:p="http://schemas.openxmlformats.org/presentationml/2006/main">
   <p:cSld>
     <p:bg>
@@ -19075,80 +21019,6 @@
     <p:extLst>
       <p:ext uri="{BB962C8B-B14F-4D97-AF65-F5344CB8AC3E}">
         <p14:creationId xmlns:p14="http://schemas.microsoft.com/office/powerpoint/2010/main" val="867387903"/>
-      </p:ext>
-    </p:extLst>
-  </p:cSld>
-  <p:clrMapOvr>
-    <a:masterClrMapping/>
-  </p:clrMapOvr>
-</p:sld>
-</file>
-
-<file path=ppt/slides/slide9.xml><?xml version="1.0" encoding="utf-8"?>
-<p:sld xmlns:a="http://schemas.openxmlformats.org/drawingml/2006/main" xmlns:r="http://schemas.openxmlformats.org/officeDocument/2006/relationships" xmlns:p="http://schemas.openxmlformats.org/presentationml/2006/main">
-  <p:cSld>
-    <p:bg>
-      <p:bgPr>
-        <a:blipFill dpi="0" rotWithShape="1">
-          <a:blip r:embed="rId2">
-            <a:lum/>
-          </a:blip>
-          <a:srcRect/>
-          <a:stretch>
-            <a:fillRect/>
-          </a:stretch>
-        </a:blipFill>
-        <a:effectLst/>
-      </p:bgPr>
-    </p:bg>
-    <p:spTree>
-      <p:nvGrpSpPr>
-        <p:cNvPr id="1" name=""/>
-        <p:cNvGrpSpPr/>
-        <p:nvPr/>
-      </p:nvGrpSpPr>
-      <p:grpSpPr>
-        <a:xfrm>
-          <a:off x="0" y="0"/>
-          <a:ext cx="0" cy="0"/>
-          <a:chOff x="0" y="0"/>
-          <a:chExt cx="0" cy="0"/>
-        </a:xfrm>
-      </p:grpSpPr>
-      <p:graphicFrame>
-        <p:nvGraphicFramePr>
-          <p:cNvPr id="2" name="Chart 1">
-            <a:extLst>
-              <a:ext uri="{FF2B5EF4-FFF2-40B4-BE49-F238E27FC236}">
-                <a16:creationId xmlns:a16="http://schemas.microsoft.com/office/drawing/2014/main" id="{9A3DBBBA-4D5E-76C1-B3FE-45B02DDB9119}"/>
-              </a:ext>
-            </a:extLst>
-          </p:cNvPr>
-          <p:cNvGraphicFramePr>
-            <a:graphicFrameLocks/>
-          </p:cNvGraphicFramePr>
-          <p:nvPr>
-            <p:extLst>
-              <p:ext uri="{D42A27DB-BD31-4B8C-83A1-F6EECF244321}">
-                <p14:modId xmlns:p14="http://schemas.microsoft.com/office/powerpoint/2010/main" val="2951281701"/>
-              </p:ext>
-            </p:extLst>
-          </p:nvPr>
-        </p:nvGraphicFramePr>
-        <p:xfrm>
-          <a:off x="643467" y="643467"/>
-          <a:ext cx="10905066" cy="5571066"/>
-        </p:xfrm>
-        <a:graphic>
-          <a:graphicData uri="http://schemas.openxmlformats.org/drawingml/2006/chart">
-            <c:chart xmlns:c="http://schemas.openxmlformats.org/drawingml/2006/chart" xmlns:r="http://schemas.openxmlformats.org/officeDocument/2006/relationships" r:id="rId3"/>
-          </a:graphicData>
-        </a:graphic>
-      </p:graphicFrame>
-    </p:spTree>
-    <p:extLst>
-      <p:ext uri="{BB962C8B-B14F-4D97-AF65-F5344CB8AC3E}">
-        <p14:creationId xmlns:p14="http://schemas.microsoft.com/office/powerpoint/2010/main" val="418326935"/>
       </p:ext>
     </p:extLst>
   </p:cSld>

--- a/Project Presentation Slides.pptx
+++ b/Project Presentation Slides.pptx
@@ -141,7 +141,7 @@
   <pc:docChgLst>
     <pc:chgData name="Brian Leung" userId="dd50ab1c25e28f6f" providerId="LiveId" clId="{594B7852-E483-4D99-B4A6-A863D3824C6F}"/>
     <pc:docChg chg="undo redo custSel addSld delSld modSld sldOrd">
-      <pc:chgData name="Brian Leung" userId="dd50ab1c25e28f6f" providerId="LiveId" clId="{594B7852-E483-4D99-B4A6-A863D3824C6F}" dt="2026-04-27T05:36:04.269" v="2293" actId="113"/>
+      <pc:chgData name="Brian Leung" userId="dd50ab1c25e28f6f" providerId="LiveId" clId="{594B7852-E483-4D99-B4A6-A863D3824C6F}" dt="2026-04-27T22:31:00.064" v="2308" actId="13926"/>
       <pc:docMkLst>
         <pc:docMk/>
       </pc:docMkLst>
@@ -288,7 +288,7 @@
         </pc:cxnChg>
       </pc:sldChg>
       <pc:sldChg chg="addSp modSp new mod ord setBg">
-        <pc:chgData name="Brian Leung" userId="dd50ab1c25e28f6f" providerId="LiveId" clId="{594B7852-E483-4D99-B4A6-A863D3824C6F}" dt="2026-04-23T01:39:58.425" v="1765" actId="255"/>
+        <pc:chgData name="Brian Leung" userId="dd50ab1c25e28f6f" providerId="LiveId" clId="{594B7852-E483-4D99-B4A6-A863D3824C6F}" dt="2026-04-27T22:19:43.570" v="2296" actId="20577"/>
         <pc:sldMkLst>
           <pc:docMk/>
           <pc:sldMk cId="1300409586" sldId="260"/>
@@ -302,7 +302,7 @@
           </ac:spMkLst>
         </pc:spChg>
         <pc:spChg chg="mod">
-          <ac:chgData name="Brian Leung" userId="dd50ab1c25e28f6f" providerId="LiveId" clId="{594B7852-E483-4D99-B4A6-A863D3824C6F}" dt="2026-04-23T01:39:58.425" v="1765" actId="255"/>
+          <ac:chgData name="Brian Leung" userId="dd50ab1c25e28f6f" providerId="LiveId" clId="{594B7852-E483-4D99-B4A6-A863D3824C6F}" dt="2026-04-27T22:19:43.570" v="2296" actId="20577"/>
           <ac:spMkLst>
             <pc:docMk/>
             <pc:sldMk cId="1300409586" sldId="260"/>
@@ -398,7 +398,7 @@
         </pc:cxnChg>
       </pc:sldChg>
       <pc:sldChg chg="addSp modSp new mod setBg">
-        <pc:chgData name="Brian Leung" userId="dd50ab1c25e28f6f" providerId="LiveId" clId="{594B7852-E483-4D99-B4A6-A863D3824C6F}" dt="2026-04-23T01:40:23.383" v="1768" actId="255"/>
+        <pc:chgData name="Brian Leung" userId="dd50ab1c25e28f6f" providerId="LiveId" clId="{594B7852-E483-4D99-B4A6-A863D3824C6F}" dt="2026-04-27T22:28:31.928" v="2297" actId="20577"/>
         <pc:sldMkLst>
           <pc:docMk/>
           <pc:sldMk cId="4161823758" sldId="263"/>
@@ -412,7 +412,7 @@
           </ac:spMkLst>
         </pc:spChg>
         <pc:spChg chg="mod">
-          <ac:chgData name="Brian Leung" userId="dd50ab1c25e28f6f" providerId="LiveId" clId="{594B7852-E483-4D99-B4A6-A863D3824C6F}" dt="2026-04-23T01:40:23.383" v="1768" actId="255"/>
+          <ac:chgData name="Brian Leung" userId="dd50ab1c25e28f6f" providerId="LiveId" clId="{594B7852-E483-4D99-B4A6-A863D3824C6F}" dt="2026-04-27T22:28:31.928" v="2297" actId="20577"/>
           <ac:spMkLst>
             <pc:docMk/>
             <pc:sldMk cId="4161823758" sldId="263"/>
@@ -453,7 +453,7 @@
         </pc:cxnChg>
       </pc:sldChg>
       <pc:sldChg chg="addSp modSp new mod setBg">
-        <pc:chgData name="Brian Leung" userId="dd50ab1c25e28f6f" providerId="LiveId" clId="{594B7852-E483-4D99-B4A6-A863D3824C6F}" dt="2026-04-27T05:30:17.204" v="2217" actId="20577"/>
+        <pc:chgData name="Brian Leung" userId="dd50ab1c25e28f6f" providerId="LiveId" clId="{594B7852-E483-4D99-B4A6-A863D3824C6F}" dt="2026-04-27T22:31:00.064" v="2308" actId="13926"/>
         <pc:sldMkLst>
           <pc:docMk/>
           <pc:sldMk cId="3198649171" sldId="266"/>
@@ -467,7 +467,7 @@
           </ac:spMkLst>
         </pc:spChg>
         <pc:spChg chg="mod">
-          <ac:chgData name="Brian Leung" userId="dd50ab1c25e28f6f" providerId="LiveId" clId="{594B7852-E483-4D99-B4A6-A863D3824C6F}" dt="2026-04-27T05:30:17.204" v="2217" actId="20577"/>
+          <ac:chgData name="Brian Leung" userId="dd50ab1c25e28f6f" providerId="LiveId" clId="{594B7852-E483-4D99-B4A6-A863D3824C6F}" dt="2026-04-27T22:31:00.064" v="2308" actId="13926"/>
           <ac:spMkLst>
             <pc:docMk/>
             <pc:sldMk cId="3198649171" sldId="266"/>
@@ -508,7 +508,7 @@
         </pc:cxnChg>
       </pc:sldChg>
       <pc:sldChg chg="modSp new mod setBg">
-        <pc:chgData name="Brian Leung" userId="dd50ab1c25e28f6f" providerId="LiveId" clId="{594B7852-E483-4D99-B4A6-A863D3824C6F}" dt="2026-04-23T01:30:56.587" v="1664" actId="207"/>
+        <pc:chgData name="Brian Leung" userId="dd50ab1c25e28f6f" providerId="LiveId" clId="{594B7852-E483-4D99-B4A6-A863D3824C6F}" dt="2026-04-27T22:30:19.461" v="2303" actId="13926"/>
         <pc:sldMkLst>
           <pc:docMk/>
           <pc:sldMk cId="3060616034" sldId="267"/>
@@ -530,7 +530,7 @@
           </ac:spMkLst>
         </pc:spChg>
         <pc:spChg chg="mod">
-          <ac:chgData name="Brian Leung" userId="dd50ab1c25e28f6f" providerId="LiveId" clId="{594B7852-E483-4D99-B4A6-A863D3824C6F}" dt="2026-04-23T01:30:44.915" v="1660" actId="207"/>
+          <ac:chgData name="Brian Leung" userId="dd50ab1c25e28f6f" providerId="LiveId" clId="{594B7852-E483-4D99-B4A6-A863D3824C6F}" dt="2026-04-27T22:30:19.461" v="2303" actId="13926"/>
           <ac:spMkLst>
             <pc:docMk/>
             <pc:sldMk cId="3060616034" sldId="267"/>
@@ -546,7 +546,7 @@
           </ac:spMkLst>
         </pc:spChg>
         <pc:spChg chg="mod">
-          <ac:chgData name="Brian Leung" userId="dd50ab1c25e28f6f" providerId="LiveId" clId="{594B7852-E483-4D99-B4A6-A863D3824C6F}" dt="2026-04-23T01:30:54.693" v="1663" actId="207"/>
+          <ac:chgData name="Brian Leung" userId="dd50ab1c25e28f6f" providerId="LiveId" clId="{594B7852-E483-4D99-B4A6-A863D3824C6F}" dt="2026-04-27T22:30:05.793" v="2301" actId="207"/>
           <ac:spMkLst>
             <pc:docMk/>
             <pc:sldMk cId="3060616034" sldId="267"/>
@@ -555,7 +555,7 @@
         </pc:spChg>
       </pc:sldChg>
       <pc:sldChg chg="addSp delSp modSp new mod ord setBg">
-        <pc:chgData name="Brian Leung" userId="dd50ab1c25e28f6f" providerId="LiveId" clId="{594B7852-E483-4D99-B4A6-A863D3824C6F}" dt="2026-04-23T01:31:25.984" v="1674" actId="207"/>
+        <pc:chgData name="Brian Leung" userId="dd50ab1c25e28f6f" providerId="LiveId" clId="{594B7852-E483-4D99-B4A6-A863D3824C6F}" dt="2026-04-27T22:30:48.414" v="2307" actId="207"/>
         <pc:sldMkLst>
           <pc:docMk/>
           <pc:sldMk cId="4070458052" sldId="268"/>
@@ -577,7 +577,7 @@
           </ac:spMkLst>
         </pc:spChg>
         <pc:spChg chg="mod">
-          <ac:chgData name="Brian Leung" userId="dd50ab1c25e28f6f" providerId="LiveId" clId="{594B7852-E483-4D99-B4A6-A863D3824C6F}" dt="2026-04-23T01:31:19.483" v="1670" actId="207"/>
+          <ac:chgData name="Brian Leung" userId="dd50ab1c25e28f6f" providerId="LiveId" clId="{594B7852-E483-4D99-B4A6-A863D3824C6F}" dt="2026-04-27T22:30:34.455" v="2305" actId="207"/>
           <ac:spMkLst>
             <pc:docMk/>
             <pc:sldMk cId="4070458052" sldId="268"/>
@@ -593,7 +593,7 @@
           </ac:spMkLst>
         </pc:spChg>
         <pc:spChg chg="mod">
-          <ac:chgData name="Brian Leung" userId="dd50ab1c25e28f6f" providerId="LiveId" clId="{594B7852-E483-4D99-B4A6-A863D3824C6F}" dt="2026-04-23T01:31:23.798" v="1673" actId="207"/>
+          <ac:chgData name="Brian Leung" userId="dd50ab1c25e28f6f" providerId="LiveId" clId="{594B7852-E483-4D99-B4A6-A863D3824C6F}" dt="2026-04-27T22:30:48.414" v="2307" actId="207"/>
           <ac:spMkLst>
             <pc:docMk/>
             <pc:sldMk cId="4070458052" sldId="268"/>
@@ -5331,7 +5331,7 @@
           <a:p>
             <a:fld id="{BE6D9CDD-3787-4722-9068-78494C9B6687}" type="datetimeFigureOut">
               <a:rPr lang="en-US" smtClean="0"/>
-              <a:t>4/26/2026</a:t>
+              <a:t>4/27/2026</a:t>
             </a:fld>
             <a:endParaRPr lang="en-US"/>
           </a:p>
@@ -5997,7 +5997,7 @@
           <a:p>
             <a:fld id="{FEFA4A9B-99ED-48EA-88D1-560238569F6F}" type="datetimeFigureOut">
               <a:rPr lang="en-US" smtClean="0"/>
-              <a:t>4/26/2026</a:t>
+              <a:t>4/27/2026</a:t>
             </a:fld>
             <a:endParaRPr lang="en-US"/>
           </a:p>
@@ -6195,7 +6195,7 @@
           <a:p>
             <a:fld id="{FEFA4A9B-99ED-48EA-88D1-560238569F6F}" type="datetimeFigureOut">
               <a:rPr lang="en-US" smtClean="0"/>
-              <a:t>4/26/2026</a:t>
+              <a:t>4/27/2026</a:t>
             </a:fld>
             <a:endParaRPr lang="en-US"/>
           </a:p>
@@ -6403,7 +6403,7 @@
           <a:p>
             <a:fld id="{FEFA4A9B-99ED-48EA-88D1-560238569F6F}" type="datetimeFigureOut">
               <a:rPr lang="en-US" smtClean="0"/>
-              <a:t>4/26/2026</a:t>
+              <a:t>4/27/2026</a:t>
             </a:fld>
             <a:endParaRPr lang="en-US"/>
           </a:p>
@@ -6601,7 +6601,7 @@
           <a:p>
             <a:fld id="{FEFA4A9B-99ED-48EA-88D1-560238569F6F}" type="datetimeFigureOut">
               <a:rPr lang="en-US" smtClean="0"/>
-              <a:t>4/26/2026</a:t>
+              <a:t>4/27/2026</a:t>
             </a:fld>
             <a:endParaRPr lang="en-US"/>
           </a:p>
@@ -6876,7 +6876,7 @@
           <a:p>
             <a:fld id="{FEFA4A9B-99ED-48EA-88D1-560238569F6F}" type="datetimeFigureOut">
               <a:rPr lang="en-US" smtClean="0"/>
-              <a:t>4/26/2026</a:t>
+              <a:t>4/27/2026</a:t>
             </a:fld>
             <a:endParaRPr lang="en-US"/>
           </a:p>
@@ -7141,7 +7141,7 @@
           <a:p>
             <a:fld id="{FEFA4A9B-99ED-48EA-88D1-560238569F6F}" type="datetimeFigureOut">
               <a:rPr lang="en-US" smtClean="0"/>
-              <a:t>4/26/2026</a:t>
+              <a:t>4/27/2026</a:t>
             </a:fld>
             <a:endParaRPr lang="en-US"/>
           </a:p>
@@ -7553,7 +7553,7 @@
           <a:p>
             <a:fld id="{FEFA4A9B-99ED-48EA-88D1-560238569F6F}" type="datetimeFigureOut">
               <a:rPr lang="en-US" smtClean="0"/>
-              <a:t>4/26/2026</a:t>
+              <a:t>4/27/2026</a:t>
             </a:fld>
             <a:endParaRPr lang="en-US"/>
           </a:p>
@@ -7694,7 +7694,7 @@
           <a:p>
             <a:fld id="{FEFA4A9B-99ED-48EA-88D1-560238569F6F}" type="datetimeFigureOut">
               <a:rPr lang="en-US" smtClean="0"/>
-              <a:t>4/26/2026</a:t>
+              <a:t>4/27/2026</a:t>
             </a:fld>
             <a:endParaRPr lang="en-US"/>
           </a:p>
@@ -7807,7 +7807,7 @@
           <a:p>
             <a:fld id="{FEFA4A9B-99ED-48EA-88D1-560238569F6F}" type="datetimeFigureOut">
               <a:rPr lang="en-US" smtClean="0"/>
-              <a:t>4/26/2026</a:t>
+              <a:t>4/27/2026</a:t>
             </a:fld>
             <a:endParaRPr lang="en-US"/>
           </a:p>
@@ -8118,7 +8118,7 @@
           <a:p>
             <a:fld id="{FEFA4A9B-99ED-48EA-88D1-560238569F6F}" type="datetimeFigureOut">
               <a:rPr lang="en-US" smtClean="0"/>
-              <a:t>4/26/2026</a:t>
+              <a:t>4/27/2026</a:t>
             </a:fld>
             <a:endParaRPr lang="en-US"/>
           </a:p>
@@ -8406,7 +8406,7 @@
           <a:p>
             <a:fld id="{FEFA4A9B-99ED-48EA-88D1-560238569F6F}" type="datetimeFigureOut">
               <a:rPr lang="en-US" smtClean="0"/>
-              <a:t>4/26/2026</a:t>
+              <a:t>4/27/2026</a:t>
             </a:fld>
             <a:endParaRPr lang="en-US"/>
           </a:p>
@@ -8647,7 +8647,7 @@
           <a:p>
             <a:fld id="{FEFA4A9B-99ED-48EA-88D1-560238569F6F}" type="datetimeFigureOut">
               <a:rPr lang="en-US" smtClean="0"/>
-              <a:t>4/26/2026</a:t>
+              <a:t>4/27/2026</a:t>
             </a:fld>
             <a:endParaRPr lang="en-US"/>
           </a:p>
@@ -13724,32 +13724,6 @@
             </a:r>
           </a:p>
           <a:p>
-            <a:pPr lvl="0"/>
-            <a:r>
-              <a:rPr lang="en-US" sz="2400" dirty="0">
-                <a:solidFill>
-                  <a:schemeClr val="tx1">
-                    <a:alpha val="80000"/>
-                  </a:schemeClr>
-                </a:solidFill>
-              </a:rPr>
-              <a:t>Perform error analysis (misclassified examples) </a:t>
-            </a:r>
-          </a:p>
-          <a:p>
-            <a:pPr lvl="0"/>
-            <a:r>
-              <a:rPr lang="en-US" sz="2400" dirty="0">
-                <a:solidFill>
-                  <a:schemeClr val="tx1">
-                    <a:alpha val="80000"/>
-                  </a:schemeClr>
-                </a:solidFill>
-              </a:rPr>
-              <a:t>Generalize to other domains </a:t>
-            </a:r>
-          </a:p>
-          <a:p>
             <a:endParaRPr lang="en-US" sz="2400" dirty="0">
               <a:solidFill>
                 <a:schemeClr val="tx1">
@@ -17678,7 +17652,7 @@
                   </a:schemeClr>
                 </a:solidFill>
               </a:rPr>
-              <a:t>URLs → HTTPURL </a:t>
+              <a:t>URLs →HTTPURL </a:t>
             </a:r>
           </a:p>
           <a:p>
@@ -18684,6 +18658,9 @@
                     <a:alpha val="80000"/>
                   </a:schemeClr>
                 </a:solidFill>
+                <a:highlight>
+                  <a:srgbClr val="00FFFF"/>
+                </a:highlight>
               </a:rPr>
               <a:t>Optimizer: </a:t>
             </a:r>
@@ -18694,6 +18671,9 @@
                     <a:alpha val="80000"/>
                   </a:schemeClr>
                 </a:solidFill>
+                <a:highlight>
+                  <a:srgbClr val="00FFFF"/>
+                </a:highlight>
               </a:rPr>
               <a:t>AdamW</a:t>
             </a:r>
@@ -18703,6 +18683,9 @@
                   <a:alpha val="80000"/>
                 </a:schemeClr>
               </a:solidFill>
+              <a:highlight>
+                <a:srgbClr val="00FFFF"/>
+              </a:highlight>
             </a:endParaRPr>
           </a:p>
           <a:p>
@@ -18714,6 +18697,9 @@
                     <a:alpha val="80000"/>
                   </a:schemeClr>
                 </a:solidFill>
+                <a:highlight>
+                  <a:srgbClr val="00FFFF"/>
+                </a:highlight>
               </a:rPr>
               <a:t>Batch size: 16 (Effective batch size = 32)</a:t>
             </a:r>
@@ -18727,6 +18713,9 @@
                     <a:alpha val="80000"/>
                   </a:schemeClr>
                 </a:solidFill>
+                <a:highlight>
+                  <a:srgbClr val="00FFFF"/>
+                </a:highlight>
               </a:rPr>
               <a:t>Gradient accumulation: 2 </a:t>
             </a:r>
@@ -18740,6 +18729,9 @@
                     <a:alpha val="80000"/>
                   </a:schemeClr>
                 </a:solidFill>
+                <a:highlight>
+                  <a:srgbClr val="00FFFF"/>
+                </a:highlight>
               </a:rPr>
               <a:t>Epochs: 3 </a:t>
             </a:r>
@@ -18982,8 +18974,8 @@
           </a:p>
         </p:txBody>
       </p:sp>
-      <mc:AlternateContent xmlns:mc="http://schemas.openxmlformats.org/markup-compatibility/2006" xmlns:a14="http://schemas.microsoft.com/office/drawing/2010/main">
-        <mc:Choice Requires="a14">
+      <mc:AlternateContent xmlns:mc="http://schemas.openxmlformats.org/markup-compatibility/2006">
+        <mc:Choice xmlns:a14="http://schemas.microsoft.com/office/drawing/2010/main" Requires="a14">
           <p:sp>
             <p:nvSpPr>
               <p:cNvPr id="4" name="Content Placeholder 3">
@@ -19014,9 +19006,9 @@
                 <a:pPr lvl="0"/>
                 <a:r>
                   <a:rPr lang="en-US" dirty="0">
-                    <a:solidFill>
-                      <a:schemeClr val="bg1"/>
-                    </a:solidFill>
+                    <a:highlight>
+                      <a:srgbClr val="00FFFF"/>
+                    </a:highlight>
                   </a:rPr>
                   <a:t>All model parameters are trainable </a:t>
                 </a:r>
@@ -19099,7 +19091,7 @@
             </p:txBody>
           </p:sp>
         </mc:Choice>
-        <mc:Fallback xmlns="">
+        <mc:Fallback>
           <p:sp>
             <p:nvSpPr>
               <p:cNvPr id="4" name="Content Placeholder 3">
@@ -19203,9 +19195,9 @@
             <a:pPr lvl="0"/>
             <a:r>
               <a:rPr lang="en-US" dirty="0">
-                <a:solidFill>
-                  <a:schemeClr val="bg1"/>
-                </a:solidFill>
+                <a:highlight>
+                  <a:srgbClr val="00FFFF"/>
+                </a:highlight>
               </a:rPr>
               <a:t>Backbone is frozen </a:t>
             </a:r>
@@ -19214,9 +19206,9 @@
             <a:pPr lvl="0"/>
             <a:r>
               <a:rPr lang="en-US" dirty="0">
-                <a:solidFill>
-                  <a:schemeClr val="bg1"/>
-                </a:solidFill>
+                <a:highlight>
+                  <a:srgbClr val="00FFFF"/>
+                </a:highlight>
               </a:rPr>
               <a:t>Only classification head is trained </a:t>
             </a:r>
@@ -19357,8 +19349,8 @@
           </a:p>
         </p:txBody>
       </p:sp>
-      <mc:AlternateContent xmlns:mc="http://schemas.openxmlformats.org/markup-compatibility/2006" xmlns:a14="http://schemas.microsoft.com/office/drawing/2010/main">
-        <mc:Choice Requires="a14">
+      <mc:AlternateContent xmlns:mc="http://schemas.openxmlformats.org/markup-compatibility/2006">
+        <mc:Choice xmlns:a14="http://schemas.microsoft.com/office/drawing/2010/main" Requires="a14">
           <p:sp>
             <p:nvSpPr>
               <p:cNvPr id="4" name="Content Placeholder 3">
@@ -19386,8 +19378,11 @@
                 <a:r>
                   <a:rPr lang="en-US" dirty="0">
                     <a:solidFill>
-                      <a:schemeClr val="bg1"/>
+                      <a:schemeClr val="tx1"/>
                     </a:solidFill>
+                    <a:highlight>
+                      <a:srgbClr val="00FFFF"/>
+                    </a:highlight>
                   </a:rPr>
                   <a:t>Injected into attention layers (query, value) </a:t>
                 </a:r>
@@ -19397,8 +19392,11 @@
                 <a:r>
                   <a:rPr lang="en-US" dirty="0">
                     <a:solidFill>
-                      <a:schemeClr val="bg1"/>
+                      <a:schemeClr val="tx1"/>
                     </a:solidFill>
+                    <a:highlight>
+                      <a:srgbClr val="00FFFF"/>
+                    </a:highlight>
                   </a:rPr>
                   <a:t>Rank </a:t>
                 </a:r>
@@ -19407,8 +19405,11 @@
                     <m:r>
                       <a:rPr lang="en-US" i="1">
                         <a:solidFill>
-                          <a:schemeClr val="bg1"/>
+                          <a:schemeClr val="tx1"/>
                         </a:solidFill>
+                        <a:highlight>
+                          <a:srgbClr val="00FFFF"/>
+                        </a:highlight>
                         <a:latin typeface="Cambria Math" panose="02040503050406030204" pitchFamily="18" charset="0"/>
                       </a:rPr>
                       <m:t>𝑟</m:t>
@@ -19416,8 +19417,11 @@
                     <m:r>
                       <a:rPr lang="en-US" i="1">
                         <a:solidFill>
-                          <a:schemeClr val="bg1"/>
+                          <a:schemeClr val="tx1"/>
                         </a:solidFill>
+                        <a:highlight>
+                          <a:srgbClr val="00FFFF"/>
+                        </a:highlight>
                         <a:latin typeface="Cambria Math" panose="02040503050406030204" pitchFamily="18" charset="0"/>
                       </a:rPr>
                       <m:t>=</m:t>
@@ -19427,8 +19431,11 @@
                 <a:r>
                   <a:rPr lang="en-US" dirty="0">
                     <a:solidFill>
-                      <a:schemeClr val="bg1"/>
+                      <a:schemeClr val="tx1"/>
                     </a:solidFill>
+                    <a:highlight>
+                      <a:srgbClr val="00FFFF"/>
+                    </a:highlight>
                   </a:rPr>
                   <a:t> 4, 8, 32 </a:t>
                 </a:r>
@@ -19438,16 +19445,22 @@
                 <a:r>
                   <a:rPr lang="en-US" dirty="0" err="1">
                     <a:solidFill>
-                      <a:schemeClr val="bg1"/>
+                      <a:schemeClr val="tx1"/>
                     </a:solidFill>
+                    <a:highlight>
+                      <a:srgbClr val="00FFFF"/>
+                    </a:highlight>
                   </a:rPr>
                   <a:t>LoRA</a:t>
                 </a:r>
                 <a:r>
                   <a:rPr lang="en-US" dirty="0">
                     <a:solidFill>
-                      <a:schemeClr val="bg1"/>
+                      <a:schemeClr val="tx1"/>
                     </a:solidFill>
+                    <a:highlight>
+                      <a:srgbClr val="00FFFF"/>
+                    </a:highlight>
                   </a:rPr>
                   <a:t> trained on various rank values</a:t>
                 </a:r>
@@ -19563,7 +19576,7 @@
             </p:txBody>
           </p:sp>
         </mc:Choice>
-        <mc:Fallback xmlns="">
+        <mc:Fallback>
           <p:sp>
             <p:nvSpPr>
               <p:cNvPr id="4" name="Content Placeholder 3">
@@ -19635,8 +19648,8 @@
           </a:p>
         </p:txBody>
       </p:sp>
-      <mc:AlternateContent xmlns:mc="http://schemas.openxmlformats.org/markup-compatibility/2006" xmlns:a14="http://schemas.microsoft.com/office/drawing/2010/main">
-        <mc:Choice Requires="a14">
+      <mc:AlternateContent xmlns:mc="http://schemas.openxmlformats.org/markup-compatibility/2006">
+        <mc:Choice xmlns:a14="http://schemas.microsoft.com/office/drawing/2010/main" Requires="a14">
           <p:sp>
             <p:nvSpPr>
               <p:cNvPr id="6" name="Content Placeholder 5">
@@ -19663,9 +19676,9 @@
                 <a:pPr lvl="0"/>
                 <a:r>
                   <a:rPr lang="en-US" dirty="0">
-                    <a:solidFill>
-                      <a:schemeClr val="bg1"/>
-                    </a:solidFill>
+                    <a:highlight>
+                      <a:srgbClr val="00FFFF"/>
+                    </a:highlight>
                   </a:rPr>
                   <a:t>Adds 20 virtual tokens as soft prompts </a:t>
                 </a:r>
@@ -19674,9 +19687,9 @@
                 <a:pPr lvl="0"/>
                 <a:r>
                   <a:rPr lang="en-US" dirty="0">
-                    <a:solidFill>
-                      <a:schemeClr val="bg1"/>
-                    </a:solidFill>
+                    <a:highlight>
+                      <a:srgbClr val="00FFFF"/>
+                    </a:highlight>
                   </a:rPr>
                   <a:t>Initialized using task-specific text:</a:t>
                 </a:r>
@@ -19685,9 +19698,9 @@
                 <a:pPr lvl="1"/>
                 <a:r>
                   <a:rPr lang="en-US" dirty="0">
-                    <a:solidFill>
-                      <a:schemeClr val="bg1"/>
-                    </a:solidFill>
+                    <a:highlight>
+                      <a:srgbClr val="00FFFF"/>
+                    </a:highlight>
                   </a:rPr>
                   <a:t>"Classify the sentiment of this tweet as positive or negative:"</a:t>
                 </a:r>
@@ -19789,7 +19802,7 @@
             </p:txBody>
           </p:sp>
         </mc:Choice>
-        <mc:Fallback xmlns="">
+        <mc:Fallback>
           <p:sp>
             <p:nvSpPr>
               <p:cNvPr id="6" name="Content Placeholder 5">
